--- a/exports/pptx/lessons/middle-module-03-ayurveda-good-health/day-03-self-assessment.pptx
+++ b/exports/pptx/lessons/middle-module-03-ayurveda-good-health/day-03-self-assessment.pptx
@@ -4244,7 +4244,7 @@
         </p:nvSpPr>
         <p:spPr>
           <a:xfrm>
-            <a:off x="406301" y="5321945"/>
+            <a:off x="406301" y="1786384"/>
             <a:ext cx="8498026" cy="213271"/>
           </a:xfrm>
           <a:prstGeom prst="rect">
@@ -4270,15 +4270,15 @@
               <a:buNone/>
             </a:pPr>
             <a:r>
-              <a:rPr lang="en-US" sz="1200" dirty="0">
-                <a:solidFill>
-                  <a:srgbClr val="1C2833"/>
-                </a:solidFill>
-                <a:latin typeface="Arial" pitchFamily="34" charset="0"/>
-                <a:ea typeface="Arial" pitchFamily="34" charset="-122"/>
-                <a:cs typeface="Arial" pitchFamily="34" charset="-120"/>
-              </a:rPr>
-              <a:t>Total: V = ___, P = ___, K = ___</a:t>
+              <a:rPr lang="en-US" sz="1200" i="1" dirty="0">
+                <a:solidFill>
+                  <a:srgbClr val="1C2833"/>
+                </a:solidFill>
+                <a:latin typeface="Arial" pitchFamily="34" charset="0"/>
+                <a:ea typeface="Arial" pitchFamily="34" charset="-122"/>
+                <a:cs typeface="Arial" pitchFamily="34" charset="-120"/>
+              </a:rPr>
+              <a:t>Each row: # · Question · V · P · K.</a:t>
             </a:r>
             <a:endParaRPr lang="en-US" sz="1200" dirty="0"/>
           </a:p>
@@ -4292,8 +4292,8 @@
         </p:nvSpPr>
         <p:spPr>
           <a:xfrm>
-            <a:off x="406301" y="5611416"/>
-            <a:ext cx="8498026" cy="213271"/>
+            <a:off x="634901" y="2088505"/>
+            <a:ext cx="8102798" cy="2963466"/>
           </a:xfrm>
           <a:prstGeom prst="rect">
             <a:avLst/>
@@ -4305,6 +4305,556 @@
           <a:bodyPr wrap="square" lIns="0" tIns="0" rIns="0" bIns="0" rtlCol="0" anchor="t"/>
           <a:lstStyle/>
           <a:p>
+            <a:pPr algn="l" marL="342900" indent="-342900">
+              <a:lnSpc>
+                <a:spcPts val="1620"/>
+              </a:lnSpc>
+              <a:spcAft>
+                <a:spcPts val="300"/>
+              </a:spcAft>
+              <a:buSzPct val="100000"/>
+              <a:buChar char="•"/>
+            </a:pPr>
+            <a:r>
+              <a:rPr lang="en-US" sz="1200" b="1" dirty="0">
+                <a:solidFill>
+                  <a:srgbClr val="1C2833"/>
+                </a:solidFill>
+                <a:latin typeface="Arial" pitchFamily="34" charset="0"/>
+                <a:ea typeface="Arial" pitchFamily="34" charset="-122"/>
+                <a:cs typeface="Arial" pitchFamily="34" charset="-120"/>
+              </a:rPr>
+              <a:t>1</a:t>
+            </a:r>
+            <a:pPr algn="l" indent="0" marL="0">
+              <a:lnSpc>
+                <a:spcPts val="1620"/>
+              </a:lnSpc>
+              <a:spcAft>
+                <a:spcPts val="300"/>
+              </a:spcAft>
+              <a:buNone/>
+            </a:pPr>
+            <a:r>
+              <a:rPr lang="en-US" sz="1200" dirty="0">
+                <a:solidFill>
+                  <a:srgbClr val="1C2833"/>
+                </a:solidFill>
+                <a:latin typeface="Arial" pitchFamily="34" charset="0"/>
+                <a:ea typeface="Arial" pitchFamily="34" charset="-122"/>
+                <a:cs typeface="Arial" pitchFamily="34" charset="-120"/>
+              </a:rPr>
+              <a:t> — Build · thin, light · medium · sturdy, heavier</a:t>
+            </a:r>
+            <a:endParaRPr lang="en-US" sz="1200" dirty="0"/>
+          </a:p>
+          <a:p>
+            <a:pPr algn="l" marL="342900" indent="-342900">
+              <a:lnSpc>
+                <a:spcPts val="1620"/>
+              </a:lnSpc>
+              <a:spcAft>
+                <a:spcPts val="300"/>
+              </a:spcAft>
+              <a:buSzPct val="100000"/>
+              <a:buChar char="•"/>
+            </a:pPr>
+            <a:r>
+              <a:rPr lang="en-US" sz="1200" b="1" dirty="0">
+                <a:solidFill>
+                  <a:srgbClr val="1C2833"/>
+                </a:solidFill>
+                <a:latin typeface="Arial" pitchFamily="34" charset="0"/>
+                <a:ea typeface="Arial" pitchFamily="34" charset="-122"/>
+                <a:cs typeface="Arial" pitchFamily="34" charset="-120"/>
+              </a:rPr>
+              <a:t>2</a:t>
+            </a:r>
+            <a:pPr algn="l" indent="0" marL="0">
+              <a:lnSpc>
+                <a:spcPts val="1620"/>
+              </a:lnSpc>
+              <a:spcAft>
+                <a:spcPts val="300"/>
+              </a:spcAft>
+              <a:buNone/>
+            </a:pPr>
+            <a:r>
+              <a:rPr lang="en-US" sz="1200" dirty="0">
+                <a:solidFill>
+                  <a:srgbClr val="1C2833"/>
+                </a:solidFill>
+                <a:latin typeface="Arial" pitchFamily="34" charset="0"/>
+                <a:ea typeface="Arial" pitchFamily="34" charset="-122"/>
+                <a:cs typeface="Arial" pitchFamily="34" charset="-120"/>
+              </a:rPr>
+              <a:t> — Skin · dry, cool · warm, sensitive · smooth, oily</a:t>
+            </a:r>
+            <a:endParaRPr lang="en-US" sz="1200" dirty="0"/>
+          </a:p>
+          <a:p>
+            <a:pPr algn="l" marL="342900" indent="-342900">
+              <a:lnSpc>
+                <a:spcPts val="1620"/>
+              </a:lnSpc>
+              <a:spcAft>
+                <a:spcPts val="300"/>
+              </a:spcAft>
+              <a:buSzPct val="100000"/>
+              <a:buChar char="•"/>
+            </a:pPr>
+            <a:r>
+              <a:rPr lang="en-US" sz="1200" b="1" dirty="0">
+                <a:solidFill>
+                  <a:srgbClr val="1C2833"/>
+                </a:solidFill>
+                <a:latin typeface="Arial" pitchFamily="34" charset="0"/>
+                <a:ea typeface="Arial" pitchFamily="34" charset="-122"/>
+                <a:cs typeface="Arial" pitchFamily="34" charset="-120"/>
+              </a:rPr>
+              <a:t>3</a:t>
+            </a:r>
+            <a:pPr algn="l" indent="0" marL="0">
+              <a:lnSpc>
+                <a:spcPts val="1620"/>
+              </a:lnSpc>
+              <a:spcAft>
+                <a:spcPts val="300"/>
+              </a:spcAft>
+              <a:buNone/>
+            </a:pPr>
+            <a:r>
+              <a:rPr lang="en-US" sz="1200" dirty="0">
+                <a:solidFill>
+                  <a:srgbClr val="1C2833"/>
+                </a:solidFill>
+                <a:latin typeface="Arial" pitchFamily="34" charset="0"/>
+                <a:ea typeface="Arial" pitchFamily="34" charset="-122"/>
+                <a:cs typeface="Arial" pitchFamily="34" charset="-120"/>
+              </a:rPr>
+              <a:t> — Energy · bursts and lulls · strong and focused · steady, slow</a:t>
+            </a:r>
+            <a:endParaRPr lang="en-US" sz="1200" dirty="0"/>
+          </a:p>
+          <a:p>
+            <a:pPr algn="l" marL="342900" indent="-342900">
+              <a:lnSpc>
+                <a:spcPts val="1620"/>
+              </a:lnSpc>
+              <a:spcAft>
+                <a:spcPts val="300"/>
+              </a:spcAft>
+              <a:buSzPct val="100000"/>
+              <a:buChar char="•"/>
+            </a:pPr>
+            <a:r>
+              <a:rPr lang="en-US" sz="1200" b="1" dirty="0">
+                <a:solidFill>
+                  <a:srgbClr val="1C2833"/>
+                </a:solidFill>
+                <a:latin typeface="Arial" pitchFamily="34" charset="0"/>
+                <a:ea typeface="Arial" pitchFamily="34" charset="-122"/>
+                <a:cs typeface="Arial" pitchFamily="34" charset="-120"/>
+              </a:rPr>
+              <a:t>4</a:t>
+            </a:r>
+            <a:pPr algn="l" indent="0" marL="0">
+              <a:lnSpc>
+                <a:spcPts val="1620"/>
+              </a:lnSpc>
+              <a:spcAft>
+                <a:spcPts val="300"/>
+              </a:spcAft>
+              <a:buNone/>
+            </a:pPr>
+            <a:r>
+              <a:rPr lang="en-US" sz="1200" dirty="0">
+                <a:solidFill>
+                  <a:srgbClr val="1C2833"/>
+                </a:solidFill>
+                <a:latin typeface="Arial" pitchFamily="34" charset="0"/>
+                <a:ea typeface="Arial" pitchFamily="34" charset="-122"/>
+                <a:cs typeface="Arial" pitchFamily="34" charset="-120"/>
+              </a:rPr>
+              <a:t> — Hunger · irregular · strong, can't skip · mild, can skip</a:t>
+            </a:r>
+            <a:endParaRPr lang="en-US" sz="1200" dirty="0"/>
+          </a:p>
+          <a:p>
+            <a:pPr algn="l" marL="342900" indent="-342900">
+              <a:lnSpc>
+                <a:spcPts val="1620"/>
+              </a:lnSpc>
+              <a:spcAft>
+                <a:spcPts val="300"/>
+              </a:spcAft>
+              <a:buSzPct val="100000"/>
+              <a:buChar char="•"/>
+            </a:pPr>
+            <a:r>
+              <a:rPr lang="en-US" sz="1200" b="1" dirty="0">
+                <a:solidFill>
+                  <a:srgbClr val="1C2833"/>
+                </a:solidFill>
+                <a:latin typeface="Arial" pitchFamily="34" charset="0"/>
+                <a:ea typeface="Arial" pitchFamily="34" charset="-122"/>
+                <a:cs typeface="Arial" pitchFamily="34" charset="-120"/>
+              </a:rPr>
+              <a:t>5</a:t>
+            </a:r>
+            <a:pPr algn="l" indent="0" marL="0">
+              <a:lnSpc>
+                <a:spcPts val="1620"/>
+              </a:lnSpc>
+              <a:spcAft>
+                <a:spcPts val="300"/>
+              </a:spcAft>
+              <a:buNone/>
+            </a:pPr>
+            <a:r>
+              <a:rPr lang="en-US" sz="1200" dirty="0">
+                <a:solidFill>
+                  <a:srgbClr val="1C2833"/>
+                </a:solidFill>
+                <a:latin typeface="Arial" pitchFamily="34" charset="0"/>
+                <a:ea typeface="Arial" pitchFamily="34" charset="-122"/>
+                <a:cs typeface="Arial" pitchFamily="34" charset="-120"/>
+              </a:rPr>
+              <a:t> — Sleep · light, easily disturbed · sound, normal · deep, long</a:t>
+            </a:r>
+            <a:endParaRPr lang="en-US" sz="1200" dirty="0"/>
+          </a:p>
+          <a:p>
+            <a:pPr algn="l" marL="342900" indent="-342900">
+              <a:lnSpc>
+                <a:spcPts val="1620"/>
+              </a:lnSpc>
+              <a:spcAft>
+                <a:spcPts val="300"/>
+              </a:spcAft>
+              <a:buSzPct val="100000"/>
+              <a:buChar char="•"/>
+            </a:pPr>
+            <a:r>
+              <a:rPr lang="en-US" sz="1200" b="1" dirty="0">
+                <a:solidFill>
+                  <a:srgbClr val="1C2833"/>
+                </a:solidFill>
+                <a:latin typeface="Arial" pitchFamily="34" charset="0"/>
+                <a:ea typeface="Arial" pitchFamily="34" charset="-122"/>
+                <a:cs typeface="Arial" pitchFamily="34" charset="-120"/>
+              </a:rPr>
+              <a:t>6</a:t>
+            </a:r>
+            <a:pPr algn="l" indent="0" marL="0">
+              <a:lnSpc>
+                <a:spcPts val="1620"/>
+              </a:lnSpc>
+              <a:spcAft>
+                <a:spcPts val="300"/>
+              </a:spcAft>
+              <a:buNone/>
+            </a:pPr>
+            <a:r>
+              <a:rPr lang="en-US" sz="1200" dirty="0">
+                <a:solidFill>
+                  <a:srgbClr val="1C2833"/>
+                </a:solidFill>
+                <a:latin typeface="Arial" pitchFamily="34" charset="0"/>
+                <a:ea typeface="Arial" pitchFamily="34" charset="-122"/>
+                <a:cs typeface="Arial" pitchFamily="34" charset="-120"/>
+              </a:rPr>
+              <a:t> — Speech · fast, talkative · sharp, persuasive · slow, calm</a:t>
+            </a:r>
+            <a:endParaRPr lang="en-US" sz="1200" dirty="0"/>
+          </a:p>
+          <a:p>
+            <a:pPr algn="l" marL="342900" indent="-342900">
+              <a:lnSpc>
+                <a:spcPts val="1620"/>
+              </a:lnSpc>
+              <a:spcAft>
+                <a:spcPts val="300"/>
+              </a:spcAft>
+              <a:buSzPct val="100000"/>
+              <a:buChar char="•"/>
+            </a:pPr>
+            <a:r>
+              <a:rPr lang="en-US" sz="1200" b="1" dirty="0">
+                <a:solidFill>
+                  <a:srgbClr val="1C2833"/>
+                </a:solidFill>
+                <a:latin typeface="Arial" pitchFamily="34" charset="0"/>
+                <a:ea typeface="Arial" pitchFamily="34" charset="-122"/>
+                <a:cs typeface="Arial" pitchFamily="34" charset="-120"/>
+              </a:rPr>
+              <a:t>7</a:t>
+            </a:r>
+            <a:pPr algn="l" indent="0" marL="0">
+              <a:lnSpc>
+                <a:spcPts val="1620"/>
+              </a:lnSpc>
+              <a:spcAft>
+                <a:spcPts val="300"/>
+              </a:spcAft>
+              <a:buNone/>
+            </a:pPr>
+            <a:r>
+              <a:rPr lang="en-US" sz="1200" dirty="0">
+                <a:solidFill>
+                  <a:srgbClr val="1C2833"/>
+                </a:solidFill>
+                <a:latin typeface="Arial" pitchFamily="34" charset="0"/>
+                <a:ea typeface="Arial" pitchFamily="34" charset="-122"/>
+                <a:cs typeface="Arial" pitchFamily="34" charset="-120"/>
+              </a:rPr>
+              <a:t> — Memory · quick to learn, quick to forget · sharp, decisive · slow, lasting</a:t>
+            </a:r>
+            <a:endParaRPr lang="en-US" sz="1200" dirty="0"/>
+          </a:p>
+          <a:p>
+            <a:pPr algn="l" marL="342900" indent="-342900">
+              <a:lnSpc>
+                <a:spcPts val="1620"/>
+              </a:lnSpc>
+              <a:spcAft>
+                <a:spcPts val="300"/>
+              </a:spcAft>
+              <a:buSzPct val="100000"/>
+              <a:buChar char="•"/>
+            </a:pPr>
+            <a:r>
+              <a:rPr lang="en-US" sz="1200" b="1" dirty="0">
+                <a:solidFill>
+                  <a:srgbClr val="1C2833"/>
+                </a:solidFill>
+                <a:latin typeface="Arial" pitchFamily="34" charset="0"/>
+                <a:ea typeface="Arial" pitchFamily="34" charset="-122"/>
+                <a:cs typeface="Arial" pitchFamily="34" charset="-120"/>
+              </a:rPr>
+              <a:t>8</a:t>
+            </a:r>
+            <a:pPr algn="l" indent="0" marL="0">
+              <a:lnSpc>
+                <a:spcPts val="1620"/>
+              </a:lnSpc>
+              <a:spcAft>
+                <a:spcPts val="300"/>
+              </a:spcAft>
+              <a:buNone/>
+            </a:pPr>
+            <a:r>
+              <a:rPr lang="en-US" sz="1200" dirty="0">
+                <a:solidFill>
+                  <a:srgbClr val="1C2833"/>
+                </a:solidFill>
+                <a:latin typeface="Arial" pitchFamily="34" charset="0"/>
+                <a:ea typeface="Arial" pitchFamily="34" charset="-122"/>
+                <a:cs typeface="Arial" pitchFamily="34" charset="-120"/>
+              </a:rPr>
+              <a:t> — Stress · anxious, worried · irritable, frustrated · withdrawn, slow</a:t>
+            </a:r>
+            <a:endParaRPr lang="en-US" sz="1200" dirty="0"/>
+          </a:p>
+          <a:p>
+            <a:pPr algn="l" marL="342900" indent="-342900">
+              <a:lnSpc>
+                <a:spcPts val="1620"/>
+              </a:lnSpc>
+              <a:spcAft>
+                <a:spcPts val="300"/>
+              </a:spcAft>
+              <a:buSzPct val="100000"/>
+              <a:buChar char="•"/>
+            </a:pPr>
+            <a:r>
+              <a:rPr lang="en-US" sz="1200" b="1" dirty="0">
+                <a:solidFill>
+                  <a:srgbClr val="1C2833"/>
+                </a:solidFill>
+                <a:latin typeface="Arial" pitchFamily="34" charset="0"/>
+                <a:ea typeface="Arial" pitchFamily="34" charset="-122"/>
+                <a:cs typeface="Arial" pitchFamily="34" charset="-120"/>
+              </a:rPr>
+              <a:t>9</a:t>
+            </a:r>
+            <a:pPr algn="l" indent="0" marL="0">
+              <a:lnSpc>
+                <a:spcPts val="1620"/>
+              </a:lnSpc>
+              <a:spcAft>
+                <a:spcPts val="300"/>
+              </a:spcAft>
+              <a:buNone/>
+            </a:pPr>
+            <a:r>
+              <a:rPr lang="en-US" sz="1200" dirty="0">
+                <a:solidFill>
+                  <a:srgbClr val="1C2833"/>
+                </a:solidFill>
+                <a:latin typeface="Arial" pitchFamily="34" charset="0"/>
+                <a:ea typeface="Arial" pitchFamily="34" charset="-122"/>
+                <a:cs typeface="Arial" pitchFamily="34" charset="-120"/>
+              </a:rPr>
+              <a:t> — Weather preferred · warm · cool · warm and dry</a:t>
+            </a:r>
+            <a:endParaRPr lang="en-US" sz="1200" dirty="0"/>
+          </a:p>
+          <a:p>
+            <a:pPr algn="l" marL="342900" indent="-342900">
+              <a:lnSpc>
+                <a:spcPts val="1620"/>
+              </a:lnSpc>
+              <a:spcAft>
+                <a:spcPts val="300"/>
+              </a:spcAft>
+              <a:buSzPct val="100000"/>
+              <a:buChar char="•"/>
+            </a:pPr>
+            <a:r>
+              <a:rPr lang="en-US" sz="1200" b="1" dirty="0">
+                <a:solidFill>
+                  <a:srgbClr val="1C2833"/>
+                </a:solidFill>
+                <a:latin typeface="Arial" pitchFamily="34" charset="0"/>
+                <a:ea typeface="Arial" pitchFamily="34" charset="-122"/>
+                <a:cs typeface="Arial" pitchFamily="34" charset="-120"/>
+              </a:rPr>
+              <a:t>10</a:t>
+            </a:r>
+            <a:pPr algn="l" indent="0" marL="0">
+              <a:lnSpc>
+                <a:spcPts val="1620"/>
+              </a:lnSpc>
+              <a:spcAft>
+                <a:spcPts val="300"/>
+              </a:spcAft>
+              <a:buNone/>
+            </a:pPr>
+            <a:r>
+              <a:rPr lang="en-US" sz="1200" dirty="0">
+                <a:solidFill>
+                  <a:srgbClr val="1C2833"/>
+                </a:solidFill>
+                <a:latin typeface="Arial" pitchFamily="34" charset="0"/>
+                <a:ea typeface="Arial" pitchFamily="34" charset="-122"/>
+                <a:cs typeface="Arial" pitchFamily="34" charset="-120"/>
+              </a:rPr>
+              <a:t> — Walking · fast · medium · slow</a:t>
+            </a:r>
+            <a:endParaRPr lang="en-US" sz="1200" dirty="0"/>
+          </a:p>
+          <a:p>
+            <a:pPr algn="l" marL="342900" indent="-342900">
+              <a:lnSpc>
+                <a:spcPts val="1620"/>
+              </a:lnSpc>
+              <a:spcAft>
+                <a:spcPts val="300"/>
+              </a:spcAft>
+              <a:buSzPct val="100000"/>
+              <a:buChar char="•"/>
+            </a:pPr>
+            <a:r>
+              <a:rPr lang="en-US" sz="1200" b="1" dirty="0">
+                <a:solidFill>
+                  <a:srgbClr val="1C2833"/>
+                </a:solidFill>
+                <a:latin typeface="Arial" pitchFamily="34" charset="0"/>
+                <a:ea typeface="Arial" pitchFamily="34" charset="-122"/>
+                <a:cs typeface="Arial" pitchFamily="34" charset="-120"/>
+              </a:rPr>
+              <a:t>11</a:t>
+            </a:r>
+            <a:pPr algn="l" indent="0" marL="0">
+              <a:lnSpc>
+                <a:spcPts val="1620"/>
+              </a:lnSpc>
+              <a:spcAft>
+                <a:spcPts val="300"/>
+              </a:spcAft>
+              <a:buNone/>
+            </a:pPr>
+            <a:r>
+              <a:rPr lang="en-US" sz="1200" dirty="0">
+                <a:solidFill>
+                  <a:srgbClr val="1C2833"/>
+                </a:solidFill>
+                <a:latin typeface="Arial" pitchFamily="34" charset="0"/>
+                <a:ea typeface="Arial" pitchFamily="34" charset="-122"/>
+                <a:cs typeface="Arial" pitchFamily="34" charset="-120"/>
+              </a:rPr>
+              <a:t> — Hands &amp; feet · cold · warm · cool, moist</a:t>
+            </a:r>
+            <a:endParaRPr lang="en-US" sz="1200" dirty="0"/>
+          </a:p>
+          <a:p>
+            <a:pPr algn="l" marL="342900" indent="-342900">
+              <a:lnSpc>
+                <a:spcPts val="1620"/>
+              </a:lnSpc>
+              <a:spcAft>
+                <a:spcPts val="300"/>
+              </a:spcAft>
+              <a:buSzPct val="100000"/>
+              <a:buChar char="•"/>
+            </a:pPr>
+            <a:r>
+              <a:rPr lang="en-US" sz="1200" b="1" dirty="0">
+                <a:solidFill>
+                  <a:srgbClr val="1C2833"/>
+                </a:solidFill>
+                <a:latin typeface="Arial" pitchFamily="34" charset="0"/>
+                <a:ea typeface="Arial" pitchFamily="34" charset="-122"/>
+                <a:cs typeface="Arial" pitchFamily="34" charset="-120"/>
+              </a:rPr>
+              <a:t>12</a:t>
+            </a:r>
+            <a:pPr algn="l" indent="0" marL="0">
+              <a:lnSpc>
+                <a:spcPts val="1620"/>
+              </a:lnSpc>
+              <a:spcAft>
+                <a:spcPts val="300"/>
+              </a:spcAft>
+              <a:buNone/>
+            </a:pPr>
+            <a:r>
+              <a:rPr lang="en-US" sz="1200" dirty="0">
+                <a:solidFill>
+                  <a:srgbClr val="1C2833"/>
+                </a:solidFill>
+                <a:latin typeface="Arial" pitchFamily="34" charset="0"/>
+                <a:ea typeface="Arial" pitchFamily="34" charset="-122"/>
+                <a:cs typeface="Arial" pitchFamily="34" charset="-120"/>
+              </a:rPr>
+              <a:t> — Spending · impulsive · calculated · careful, saver</a:t>
+            </a:r>
+            <a:endParaRPr lang="en-US" sz="1200" dirty="0"/>
+          </a:p>
+        </p:txBody>
+      </p:sp>
+      <p:sp>
+        <p:nvSpPr>
+          <p:cNvPr id="9" name="Text 7"/>
+          <p:cNvSpPr/>
+          <p:nvPr/>
+        </p:nvSpPr>
+        <p:spPr>
+          <a:xfrm>
+            <a:off x="406301" y="5140821"/>
+            <a:ext cx="8498026" cy="213271"/>
+          </a:xfrm>
+          <a:prstGeom prst="rect">
+            <a:avLst/>
+          </a:prstGeom>
+          <a:noFill/>
+          <a:ln/>
+        </p:spPr>
+        <p:txBody>
+          <a:bodyPr wrap="square" lIns="0" tIns="0" rIns="0" bIns="0" rtlCol="0" anchor="t"/>
+          <a:lstStyle/>
+          <a:p>
             <a:pPr algn="l" indent="0" marL="0">
               <a:lnSpc>
                 <a:spcPts val="1680"/>
@@ -4326,6 +4876,54 @@
                 <a:ea typeface="Arial" pitchFamily="34" charset="-122"/>
                 <a:cs typeface="Arial" pitchFamily="34" charset="-120"/>
               </a:rPr>
+              <a:t>Total: V = ___, P = ___, K = ___</a:t>
+            </a:r>
+            <a:endParaRPr lang="en-US" sz="1200" dirty="0"/>
+          </a:p>
+        </p:txBody>
+      </p:sp>
+      <p:sp>
+        <p:nvSpPr>
+          <p:cNvPr id="10" name="Text 8"/>
+          <p:cNvSpPr/>
+          <p:nvPr/>
+        </p:nvSpPr>
+        <p:spPr>
+          <a:xfrm>
+            <a:off x="406301" y="5430292"/>
+            <a:ext cx="8498026" cy="213271"/>
+          </a:xfrm>
+          <a:prstGeom prst="rect">
+            <a:avLst/>
+          </a:prstGeom>
+          <a:noFill/>
+          <a:ln/>
+        </p:spPr>
+        <p:txBody>
+          <a:bodyPr wrap="square" lIns="0" tIns="0" rIns="0" bIns="0" rtlCol="0" anchor="t"/>
+          <a:lstStyle/>
+          <a:p>
+            <a:pPr algn="l" indent="0" marL="0">
+              <a:lnSpc>
+                <a:spcPts val="1680"/>
+              </a:lnSpc>
+              <a:spcBef>
+                <a:spcPts val="300"/>
+              </a:spcBef>
+              <a:spcAft>
+                <a:spcPts val="300"/>
+              </a:spcAft>
+              <a:buNone/>
+            </a:pPr>
+            <a:r>
+              <a:rPr lang="en-US" sz="1200" dirty="0">
+                <a:solidFill>
+                  <a:srgbClr val="1C2833"/>
+                </a:solidFill>
+                <a:latin typeface="Arial" pitchFamily="34" charset="0"/>
+                <a:ea typeface="Arial" pitchFamily="34" charset="-122"/>
+                <a:cs typeface="Arial" pitchFamily="34" charset="-120"/>
+              </a:rPr>
               <a:t>The largest score = your </a:t>
             </a:r>
             <a:pPr algn="l" indent="0" marL="0">
@@ -4380,13 +4978,13 @@
       </p:sp>
       <p:sp>
         <p:nvSpPr>
-          <p:cNvPr id="9" name="Text 7"/>
-          <p:cNvSpPr/>
-          <p:nvPr/>
-        </p:nvSpPr>
-        <p:spPr>
-          <a:xfrm>
-            <a:off x="406301" y="5977086"/>
+          <p:cNvPr id="11" name="Text 9"/>
+          <p:cNvSpPr/>
+          <p:nvPr/>
+        </p:nvSpPr>
+        <p:spPr>
+          <a:xfrm>
+            <a:off x="406301" y="5795963"/>
             <a:ext cx="8498026" cy="213271"/>
           </a:xfrm>
           <a:prstGeom prst="rect">

--- a/exports/pptx/lessons/middle-module-03-ayurveda-good-health/day-03-self-assessment.pptx
+++ b/exports/pptx/lessons/middle-module-03-ayurveda-good-health/day-03-self-assessment.pptx
@@ -17,9 +17,13 @@
     <p:sldId id="265" r:id="rId11"/>
     <p:sldId id="266" r:id="rId12"/>
     <p:sldId id="267" r:id="rId13"/>
+    <p:sldId id="268" r:id="rId14"/>
+    <p:sldId id="269" r:id="rId15"/>
+    <p:sldId id="270" r:id="rId16"/>
+    <p:sldId id="271" r:id="rId17"/>
   </p:sldIdLst>
   <p:notesMasterIdLst>
-    <p:notesMasterId r:id="rId14"/>
+    <p:notesMasterId r:id="rId18"/>
   </p:notesMasterIdLst>
   <p:sldSz cx="9144000" cy="5143500"/>
   <p:notesSz cx="5143500" cy="9144000"/>
@@ -801,6 +805,358 @@
             <a:fld id="{F7021451-1387-4CA6-816F-3879F97B5CBC}" type="slidenum">
               <a:rPr lang="en-US"/>
               <a:t>12</a:t>
+            </a:fld>
+            <a:endParaRPr lang="en-US"/>
+          </a:p>
+        </p:txBody>
+      </p:sp>
+    </p:spTree>
+    <p:extLst>
+      <p:ext uri="{BB962C8B-B14F-4D97-AF65-F5344CB8AC3E}">
+        <p14:creationId xmlns:p14="http://schemas.microsoft.com/office/powerpoint/2010/main" val="1024086991"/>
+      </p:ext>
+    </p:extLst>
+  </p:cSld>
+  <p:clrMapOvr>
+    <a:masterClrMapping/>
+  </p:clrMapOvr>
+</p:notes>
+</file>
+
+<file path=ppt/notesSlides/notesSlide13.xml><?xml version="1.0" encoding="utf-8"?>
+<p:notes xmlns:a="http://schemas.openxmlformats.org/drawingml/2006/main" xmlns:r="http://schemas.openxmlformats.org/officeDocument/2006/relationships" xmlns:p="http://schemas.openxmlformats.org/presentationml/2006/main">
+  <p:cSld>
+    <p:spTree>
+      <p:nvGrpSpPr>
+        <p:cNvPr id="1" name=""/>
+        <p:cNvGrpSpPr/>
+        <p:nvPr/>
+      </p:nvGrpSpPr>
+      <p:grpSpPr>
+        <a:xfrm>
+          <a:off x="0" y="0"/>
+          <a:ext cx="0" cy="0"/>
+          <a:chOff x="0" y="0"/>
+          <a:chExt cx="0" cy="0"/>
+        </a:xfrm>
+      </p:grpSpPr>
+      <p:sp>
+        <p:nvSpPr>
+          <p:cNvPr id="2" name="Slide Image Placeholder 1"/>
+          <p:cNvSpPr>
+            <a:spLocks noGrp="1" noRot="1" noChangeAspect="1"/>
+          </p:cNvSpPr>
+          <p:nvPr>
+            <p:ph type="sldImg"/>
+          </p:nvPr>
+        </p:nvSpPr>
+        <p:spPr/>
+      </p:sp>
+      <p:sp>
+        <p:nvSpPr>
+          <p:cNvPr id="3" name="Notes Placeholder 2"/>
+          <p:cNvSpPr>
+            <a:spLocks noGrp="1"/>
+          </p:cNvSpPr>
+          <p:nvPr>
+            <p:ph type="body" idx="1"/>
+          </p:nvPr>
+        </p:nvSpPr>
+        <p:spPr/>
+        <p:txBody>
+          <a:bodyPr/>
+          <a:lstStyle/>
+          <a:p>
+            <a:r>
+              <a:rPr lang="en-US" dirty="0"/>
+              <a:t/>
+            </a:r>
+            <a:endParaRPr lang="en-US" dirty="0"/>
+          </a:p>
+        </p:txBody>
+      </p:sp>
+      <p:sp>
+        <p:nvSpPr>
+          <p:cNvPr id="4" name="Slide Number Placeholder 3"/>
+          <p:cNvSpPr>
+            <a:spLocks noGrp="1"/>
+          </p:cNvSpPr>
+          <p:nvPr>
+            <p:ph type="sldNum" sz="quarter" idx="10"/>
+          </p:nvPr>
+        </p:nvSpPr>
+        <p:spPr/>
+        <p:txBody>
+          <a:bodyPr/>
+          <a:lstStyle/>
+          <a:p>
+            <a:fld id="{F7021451-1387-4CA6-816F-3879F97B5CBC}" type="slidenum">
+              <a:rPr lang="en-US"/>
+              <a:t>13</a:t>
+            </a:fld>
+            <a:endParaRPr lang="en-US"/>
+          </a:p>
+        </p:txBody>
+      </p:sp>
+    </p:spTree>
+    <p:extLst>
+      <p:ext uri="{BB962C8B-B14F-4D97-AF65-F5344CB8AC3E}">
+        <p14:creationId xmlns:p14="http://schemas.microsoft.com/office/powerpoint/2010/main" val="1024086991"/>
+      </p:ext>
+    </p:extLst>
+  </p:cSld>
+  <p:clrMapOvr>
+    <a:masterClrMapping/>
+  </p:clrMapOvr>
+</p:notes>
+</file>
+
+<file path=ppt/notesSlides/notesSlide14.xml><?xml version="1.0" encoding="utf-8"?>
+<p:notes xmlns:a="http://schemas.openxmlformats.org/drawingml/2006/main" xmlns:r="http://schemas.openxmlformats.org/officeDocument/2006/relationships" xmlns:p="http://schemas.openxmlformats.org/presentationml/2006/main">
+  <p:cSld>
+    <p:spTree>
+      <p:nvGrpSpPr>
+        <p:cNvPr id="1" name=""/>
+        <p:cNvGrpSpPr/>
+        <p:nvPr/>
+      </p:nvGrpSpPr>
+      <p:grpSpPr>
+        <a:xfrm>
+          <a:off x="0" y="0"/>
+          <a:ext cx="0" cy="0"/>
+          <a:chOff x="0" y="0"/>
+          <a:chExt cx="0" cy="0"/>
+        </a:xfrm>
+      </p:grpSpPr>
+      <p:sp>
+        <p:nvSpPr>
+          <p:cNvPr id="2" name="Slide Image Placeholder 1"/>
+          <p:cNvSpPr>
+            <a:spLocks noGrp="1" noRot="1" noChangeAspect="1"/>
+          </p:cNvSpPr>
+          <p:nvPr>
+            <p:ph type="sldImg"/>
+          </p:nvPr>
+        </p:nvSpPr>
+        <p:spPr/>
+      </p:sp>
+      <p:sp>
+        <p:nvSpPr>
+          <p:cNvPr id="3" name="Notes Placeholder 2"/>
+          <p:cNvSpPr>
+            <a:spLocks noGrp="1"/>
+          </p:cNvSpPr>
+          <p:nvPr>
+            <p:ph type="body" idx="1"/>
+          </p:nvPr>
+        </p:nvSpPr>
+        <p:spPr/>
+        <p:txBody>
+          <a:bodyPr/>
+          <a:lstStyle/>
+          <a:p>
+            <a:r>
+              <a:rPr lang="en-US" dirty="0"/>
+              <a:t/>
+            </a:r>
+            <a:endParaRPr lang="en-US" dirty="0"/>
+          </a:p>
+        </p:txBody>
+      </p:sp>
+      <p:sp>
+        <p:nvSpPr>
+          <p:cNvPr id="4" name="Slide Number Placeholder 3"/>
+          <p:cNvSpPr>
+            <a:spLocks noGrp="1"/>
+          </p:cNvSpPr>
+          <p:nvPr>
+            <p:ph type="sldNum" sz="quarter" idx="10"/>
+          </p:nvPr>
+        </p:nvSpPr>
+        <p:spPr/>
+        <p:txBody>
+          <a:bodyPr/>
+          <a:lstStyle/>
+          <a:p>
+            <a:fld id="{F7021451-1387-4CA6-816F-3879F97B5CBC}" type="slidenum">
+              <a:rPr lang="en-US"/>
+              <a:t>14</a:t>
+            </a:fld>
+            <a:endParaRPr lang="en-US"/>
+          </a:p>
+        </p:txBody>
+      </p:sp>
+    </p:spTree>
+    <p:extLst>
+      <p:ext uri="{BB962C8B-B14F-4D97-AF65-F5344CB8AC3E}">
+        <p14:creationId xmlns:p14="http://schemas.microsoft.com/office/powerpoint/2010/main" val="1024086991"/>
+      </p:ext>
+    </p:extLst>
+  </p:cSld>
+  <p:clrMapOvr>
+    <a:masterClrMapping/>
+  </p:clrMapOvr>
+</p:notes>
+</file>
+
+<file path=ppt/notesSlides/notesSlide15.xml><?xml version="1.0" encoding="utf-8"?>
+<p:notes xmlns:a="http://schemas.openxmlformats.org/drawingml/2006/main" xmlns:r="http://schemas.openxmlformats.org/officeDocument/2006/relationships" xmlns:p="http://schemas.openxmlformats.org/presentationml/2006/main">
+  <p:cSld>
+    <p:spTree>
+      <p:nvGrpSpPr>
+        <p:cNvPr id="1" name=""/>
+        <p:cNvGrpSpPr/>
+        <p:nvPr/>
+      </p:nvGrpSpPr>
+      <p:grpSpPr>
+        <a:xfrm>
+          <a:off x="0" y="0"/>
+          <a:ext cx="0" cy="0"/>
+          <a:chOff x="0" y="0"/>
+          <a:chExt cx="0" cy="0"/>
+        </a:xfrm>
+      </p:grpSpPr>
+      <p:sp>
+        <p:nvSpPr>
+          <p:cNvPr id="2" name="Slide Image Placeholder 1"/>
+          <p:cNvSpPr>
+            <a:spLocks noGrp="1" noRot="1" noChangeAspect="1"/>
+          </p:cNvSpPr>
+          <p:nvPr>
+            <p:ph type="sldImg"/>
+          </p:nvPr>
+        </p:nvSpPr>
+        <p:spPr/>
+      </p:sp>
+      <p:sp>
+        <p:nvSpPr>
+          <p:cNvPr id="3" name="Notes Placeholder 2"/>
+          <p:cNvSpPr>
+            <a:spLocks noGrp="1"/>
+          </p:cNvSpPr>
+          <p:nvPr>
+            <p:ph type="body" idx="1"/>
+          </p:nvPr>
+        </p:nvSpPr>
+        <p:spPr/>
+        <p:txBody>
+          <a:bodyPr/>
+          <a:lstStyle/>
+          <a:p>
+            <a:r>
+              <a:rPr lang="en-US" dirty="0"/>
+              <a:t/>
+            </a:r>
+            <a:endParaRPr lang="en-US" dirty="0"/>
+          </a:p>
+        </p:txBody>
+      </p:sp>
+      <p:sp>
+        <p:nvSpPr>
+          <p:cNvPr id="4" name="Slide Number Placeholder 3"/>
+          <p:cNvSpPr>
+            <a:spLocks noGrp="1"/>
+          </p:cNvSpPr>
+          <p:nvPr>
+            <p:ph type="sldNum" sz="quarter" idx="10"/>
+          </p:nvPr>
+        </p:nvSpPr>
+        <p:spPr/>
+        <p:txBody>
+          <a:bodyPr/>
+          <a:lstStyle/>
+          <a:p>
+            <a:fld id="{F7021451-1387-4CA6-816F-3879F97B5CBC}" type="slidenum">
+              <a:rPr lang="en-US"/>
+              <a:t>15</a:t>
+            </a:fld>
+            <a:endParaRPr lang="en-US"/>
+          </a:p>
+        </p:txBody>
+      </p:sp>
+    </p:spTree>
+    <p:extLst>
+      <p:ext uri="{BB962C8B-B14F-4D97-AF65-F5344CB8AC3E}">
+        <p14:creationId xmlns:p14="http://schemas.microsoft.com/office/powerpoint/2010/main" val="1024086991"/>
+      </p:ext>
+    </p:extLst>
+  </p:cSld>
+  <p:clrMapOvr>
+    <a:masterClrMapping/>
+  </p:clrMapOvr>
+</p:notes>
+</file>
+
+<file path=ppt/notesSlides/notesSlide16.xml><?xml version="1.0" encoding="utf-8"?>
+<p:notes xmlns:a="http://schemas.openxmlformats.org/drawingml/2006/main" xmlns:r="http://schemas.openxmlformats.org/officeDocument/2006/relationships" xmlns:p="http://schemas.openxmlformats.org/presentationml/2006/main">
+  <p:cSld>
+    <p:spTree>
+      <p:nvGrpSpPr>
+        <p:cNvPr id="1" name=""/>
+        <p:cNvGrpSpPr/>
+        <p:nvPr/>
+      </p:nvGrpSpPr>
+      <p:grpSpPr>
+        <a:xfrm>
+          <a:off x="0" y="0"/>
+          <a:ext cx="0" cy="0"/>
+          <a:chOff x="0" y="0"/>
+          <a:chExt cx="0" cy="0"/>
+        </a:xfrm>
+      </p:grpSpPr>
+      <p:sp>
+        <p:nvSpPr>
+          <p:cNvPr id="2" name="Slide Image Placeholder 1"/>
+          <p:cNvSpPr>
+            <a:spLocks noGrp="1" noRot="1" noChangeAspect="1"/>
+          </p:cNvSpPr>
+          <p:nvPr>
+            <p:ph type="sldImg"/>
+          </p:nvPr>
+        </p:nvSpPr>
+        <p:spPr/>
+      </p:sp>
+      <p:sp>
+        <p:nvSpPr>
+          <p:cNvPr id="3" name="Notes Placeholder 2"/>
+          <p:cNvSpPr>
+            <a:spLocks noGrp="1"/>
+          </p:cNvSpPr>
+          <p:nvPr>
+            <p:ph type="body" idx="1"/>
+          </p:nvPr>
+        </p:nvSpPr>
+        <p:spPr/>
+        <p:txBody>
+          <a:bodyPr/>
+          <a:lstStyle/>
+          <a:p>
+            <a:r>
+              <a:rPr lang="en-US" dirty="0"/>
+              <a:t/>
+            </a:r>
+            <a:endParaRPr lang="en-US" dirty="0"/>
+          </a:p>
+        </p:txBody>
+      </p:sp>
+      <p:sp>
+        <p:nvSpPr>
+          <p:cNvPr id="4" name="Slide Number Placeholder 3"/>
+          <p:cNvSpPr>
+            <a:spLocks noGrp="1"/>
+          </p:cNvSpPr>
+          <p:nvPr>
+            <p:ph type="sldNum" sz="quarter" idx="10"/>
+          </p:nvPr>
+        </p:nvSpPr>
+        <p:spPr/>
+        <p:txBody>
+          <a:bodyPr/>
+          <a:lstStyle/>
+          <a:p>
+            <a:fld id="{F7021451-1387-4CA6-816F-3879F97B5CBC}" type="slidenum">
+              <a:rPr lang="en-US"/>
+              <a:t>16</a:t>
             </a:fld>
             <a:endParaRPr lang="en-US"/>
           </a:p>
@@ -2054,102 +2410,6 @@
         </p:nvSpPr>
         <p:spPr>
           <a:xfrm>
-            <a:off x="406301" y="1223963"/>
-            <a:ext cx="8498026" cy="274290"/>
-          </a:xfrm>
-          <a:prstGeom prst="rect">
-            <a:avLst/>
-          </a:prstGeom>
-          <a:noFill/>
-          <a:ln/>
-        </p:spPr>
-        <p:txBody>
-          <a:bodyPr wrap="square" lIns="0" tIns="0" rIns="0" bIns="0" rtlCol="0" anchor="t"/>
-          <a:lstStyle/>
-          <a:p>
-            <a:pPr algn="l" indent="0" marL="0">
-              <a:lnSpc>
-                <a:spcPts val="2160"/>
-              </a:lnSpc>
-              <a:spcBef>
-                <a:spcPts val="600"/>
-              </a:spcBef>
-              <a:spcAft>
-                <a:spcPts val="800"/>
-              </a:spcAft>
-              <a:buNone/>
-            </a:pPr>
-            <a:r>
-              <a:rPr lang="en-US" sz="1800" b="1" dirty="0">
-                <a:solidFill>
-                  <a:srgbClr val="FE4447"/>
-                </a:solidFill>
-                <a:latin typeface="Georgia" pitchFamily="34" charset="0"/>
-                <a:ea typeface="Georgia" pitchFamily="34" charset="-122"/>
-                <a:cs typeface="Georgia" pitchFamily="34" charset="-120"/>
-              </a:rPr>
-              <a:t>Learning objective</a:t>
-            </a:r>
-            <a:endParaRPr lang="en-US" sz="1800" dirty="0"/>
-          </a:p>
-        </p:txBody>
-      </p:sp>
-      <p:sp>
-        <p:nvSpPr>
-          <p:cNvPr id="6" name="Text 4"/>
-          <p:cNvSpPr/>
-          <p:nvPr/>
-        </p:nvSpPr>
-        <p:spPr>
-          <a:xfrm>
-            <a:off x="406301" y="1637854"/>
-            <a:ext cx="8498026" cy="426541"/>
-          </a:xfrm>
-          <a:prstGeom prst="rect">
-            <a:avLst/>
-          </a:prstGeom>
-          <a:noFill/>
-          <a:ln/>
-        </p:spPr>
-        <p:txBody>
-          <a:bodyPr wrap="square" lIns="0" tIns="0" rIns="0" bIns="0" rtlCol="0" anchor="t"/>
-          <a:lstStyle/>
-          <a:p>
-            <a:pPr algn="l" indent="0" marL="0">
-              <a:lnSpc>
-                <a:spcPts val="1680"/>
-              </a:lnSpc>
-              <a:spcBef>
-                <a:spcPts val="300"/>
-              </a:spcBef>
-              <a:spcAft>
-                <a:spcPts val="300"/>
-              </a:spcAft>
-              <a:buNone/>
-            </a:pPr>
-            <a:r>
-              <a:rPr lang="en-US" sz="1200" dirty="0">
-                <a:solidFill>
-                  <a:srgbClr val="1C2833"/>
-                </a:solidFill>
-                <a:latin typeface="Arial" pitchFamily="34" charset="0"/>
-                <a:ea typeface="Arial" pitchFamily="34" charset="-122"/>
-                <a:cs typeface="Arial" pitchFamily="34" charset="-120"/>
-              </a:rPr>
-              <a:t>Students apply the dosha framework to themselves via a self-assessment worksheet, while understanding firmly that it is for fun and learning, not medical diagnosis.</a:t>
-            </a:r>
-            <a:endParaRPr lang="en-US" sz="1200" dirty="0"/>
-          </a:p>
-        </p:txBody>
-      </p:sp>
-      <p:sp>
-        <p:nvSpPr>
-          <p:cNvPr id="7" name="Text 5"/>
-          <p:cNvSpPr/>
-          <p:nvPr/>
-        </p:nvSpPr>
-        <p:spPr>
-          <a:xfrm>
             <a:off x="406301" y="4434929"/>
             <a:ext cx="8498026" cy="213271"/>
           </a:xfrm>
@@ -2294,7 +2554,7 @@
                 <a:ea typeface="Georgia" pitchFamily="34" charset="-122"/>
                 <a:cs typeface="Georgia" pitchFamily="34" charset="-120"/>
               </a:rPr>
-              <a:t>Differentiation</a:t>
+              <a:t>Self-assessment (15 min) (cont.)</a:t>
             </a:r>
             <a:endParaRPr lang="en-US" sz="1800" dirty="0"/>
           </a:p>
@@ -2309,7 +2569,7 @@
         <p:spPr>
           <a:xfrm>
             <a:off x="634901" y="883593"/>
-            <a:ext cx="8102798" cy="525661"/>
+            <a:ext cx="8102798" cy="769441"/>
           </a:xfrm>
           <a:prstGeom prst="rect">
             <a:avLst/>
@@ -2340,7 +2600,7 @@
                 <a:ea typeface="Arial" pitchFamily="34" charset="-122"/>
                 <a:cs typeface="Arial" pitchFamily="34" charset="-120"/>
               </a:rPr>
-              <a:t>Tier up:</a:t>
+              <a:t>10</a:t>
             </a:r>
             <a:pPr algn="l" indent="0" marL="0">
               <a:lnSpc>
@@ -2360,7 +2620,7 @@
                 <a:ea typeface="Arial" pitchFamily="34" charset="-122"/>
                 <a:cs typeface="Arial" pitchFamily="34" charset="-120"/>
               </a:rPr>
-              <a:t> Notice your result; do you AGREE? If not, why might the framework miss?</a:t>
+              <a:t> — Walking · fast · medium · slow</a:t>
             </a:r>
             <a:endParaRPr lang="en-US" sz="1200" dirty="0"/>
           </a:p>
@@ -2384,7 +2644,7 @@
                 <a:ea typeface="Arial" pitchFamily="34" charset="-122"/>
                 <a:cs typeface="Arial" pitchFamily="34" charset="-120"/>
               </a:rPr>
-              <a:t>Tier down:</a:t>
+              <a:t>11</a:t>
             </a:r>
             <a:pPr algn="l" indent="0" marL="0">
               <a:lnSpc>
@@ -2404,15 +2664,201 @@
                 <a:ea typeface="Arial" pitchFamily="34" charset="-122"/>
                 <a:cs typeface="Arial" pitchFamily="34" charset="-120"/>
               </a:rPr>
-              <a:t> Focus on Q1–6; skip Q7–12.</a:t>
+              <a:t> — Hands &amp; feet · cold · warm · cool, moist</a:t>
             </a:r>
             <a:endParaRPr lang="en-US" sz="1200" dirty="0"/>
           </a:p>
+          <a:p>
+            <a:pPr algn="l" marL="342900" indent="-342900">
+              <a:lnSpc>
+                <a:spcPts val="1620"/>
+              </a:lnSpc>
+              <a:spcAft>
+                <a:spcPts val="300"/>
+              </a:spcAft>
+              <a:buSzPct val="100000"/>
+              <a:buChar char="•"/>
+            </a:pPr>
+            <a:r>
+              <a:rPr lang="en-US" sz="1200" b="1" dirty="0">
+                <a:solidFill>
+                  <a:srgbClr val="1C2833"/>
+                </a:solidFill>
+                <a:latin typeface="Arial" pitchFamily="34" charset="0"/>
+                <a:ea typeface="Arial" pitchFamily="34" charset="-122"/>
+                <a:cs typeface="Arial" pitchFamily="34" charset="-120"/>
+              </a:rPr>
+              <a:t>12</a:t>
+            </a:r>
+            <a:pPr algn="l" indent="0" marL="0">
+              <a:lnSpc>
+                <a:spcPts val="1620"/>
+              </a:lnSpc>
+              <a:spcAft>
+                <a:spcPts val="300"/>
+              </a:spcAft>
+              <a:buNone/>
+            </a:pPr>
+            <a:r>
+              <a:rPr lang="en-US" sz="1200" dirty="0">
+                <a:solidFill>
+                  <a:srgbClr val="1C2833"/>
+                </a:solidFill>
+                <a:latin typeface="Arial" pitchFamily="34" charset="0"/>
+                <a:ea typeface="Arial" pitchFamily="34" charset="-122"/>
+                <a:cs typeface="Arial" pitchFamily="34" charset="-120"/>
+              </a:rPr>
+              <a:t> — Spending · impulsive · calculated · careful, saver</a:t>
+            </a:r>
+            <a:endParaRPr lang="en-US" sz="1200" dirty="0"/>
+          </a:p>
         </p:txBody>
       </p:sp>
       <p:sp>
         <p:nvSpPr>
           <p:cNvPr id="5" name="Text 3"/>
+          <p:cNvSpPr/>
+          <p:nvPr/>
+        </p:nvSpPr>
+        <p:spPr>
+          <a:xfrm>
+            <a:off x="406301" y="1741884"/>
+            <a:ext cx="8498026" cy="213271"/>
+          </a:xfrm>
+          <a:prstGeom prst="rect">
+            <a:avLst/>
+          </a:prstGeom>
+          <a:noFill/>
+          <a:ln/>
+        </p:spPr>
+        <p:txBody>
+          <a:bodyPr wrap="square" lIns="0" tIns="0" rIns="0" bIns="0" rtlCol="0" anchor="t"/>
+          <a:lstStyle/>
+          <a:p>
+            <a:pPr algn="l" indent="0" marL="0">
+              <a:lnSpc>
+                <a:spcPts val="1680"/>
+              </a:lnSpc>
+              <a:spcBef>
+                <a:spcPts val="300"/>
+              </a:spcBef>
+              <a:spcAft>
+                <a:spcPts val="300"/>
+              </a:spcAft>
+              <a:buNone/>
+            </a:pPr>
+            <a:r>
+              <a:rPr lang="en-US" sz="1200" dirty="0">
+                <a:solidFill>
+                  <a:srgbClr val="1C2833"/>
+                </a:solidFill>
+                <a:latin typeface="Arial" pitchFamily="34" charset="0"/>
+                <a:ea typeface="Arial" pitchFamily="34" charset="-122"/>
+                <a:cs typeface="Arial" pitchFamily="34" charset="-120"/>
+              </a:rPr>
+              <a:t>Total: V = ___, P = ___, K = ___</a:t>
+            </a:r>
+            <a:endParaRPr lang="en-US" sz="1200" dirty="0"/>
+          </a:p>
+        </p:txBody>
+      </p:sp>
+      <p:sp>
+        <p:nvSpPr>
+          <p:cNvPr id="6" name="Text 4"/>
+          <p:cNvSpPr/>
+          <p:nvPr/>
+        </p:nvSpPr>
+        <p:spPr>
+          <a:xfrm>
+            <a:off x="406301" y="2031355"/>
+            <a:ext cx="8498026" cy="213271"/>
+          </a:xfrm>
+          <a:prstGeom prst="rect">
+            <a:avLst/>
+          </a:prstGeom>
+          <a:noFill/>
+          <a:ln/>
+        </p:spPr>
+        <p:txBody>
+          <a:bodyPr wrap="square" lIns="0" tIns="0" rIns="0" bIns="0" rtlCol="0" anchor="t"/>
+          <a:lstStyle/>
+          <a:p>
+            <a:pPr algn="l" indent="0" marL="0">
+              <a:lnSpc>
+                <a:spcPts val="1680"/>
+              </a:lnSpc>
+              <a:spcBef>
+                <a:spcPts val="300"/>
+              </a:spcBef>
+              <a:spcAft>
+                <a:spcPts val="300"/>
+              </a:spcAft>
+              <a:buNone/>
+            </a:pPr>
+            <a:r>
+              <a:rPr lang="en-US" sz="1200" dirty="0">
+                <a:solidFill>
+                  <a:srgbClr val="1C2833"/>
+                </a:solidFill>
+                <a:latin typeface="Arial" pitchFamily="34" charset="0"/>
+                <a:ea typeface="Arial" pitchFamily="34" charset="-122"/>
+                <a:cs typeface="Arial" pitchFamily="34" charset="-120"/>
+              </a:rPr>
+              <a:t>The largest score = your </a:t>
+            </a:r>
+            <a:pPr algn="l" indent="0" marL="0">
+              <a:lnSpc>
+                <a:spcPts val="1680"/>
+              </a:lnSpc>
+              <a:spcBef>
+                <a:spcPts val="300"/>
+              </a:spcBef>
+              <a:spcAft>
+                <a:spcPts val="300"/>
+              </a:spcAft>
+              <a:buNone/>
+            </a:pPr>
+            <a:r>
+              <a:rPr lang="en-US" sz="1200" i="1" dirty="0">
+                <a:solidFill>
+                  <a:srgbClr val="1C2833"/>
+                </a:solidFill>
+                <a:latin typeface="Arial" pitchFamily="34" charset="0"/>
+                <a:ea typeface="Arial" pitchFamily="34" charset="-122"/>
+                <a:cs typeface="Arial" pitchFamily="34" charset="-120"/>
+              </a:rPr>
+              <a:t>current</a:t>
+            </a:r>
+            <a:pPr algn="l" indent="0" marL="0">
+              <a:lnSpc>
+                <a:spcPts val="1680"/>
+              </a:lnSpc>
+              <a:spcBef>
+                <a:spcPts val="300"/>
+              </a:spcBef>
+              <a:spcAft>
+                <a:spcPts val="300"/>
+              </a:spcAft>
+              <a:buNone/>
+            </a:pPr>
+            <a:r>
+              <a:rPr lang="en-US" sz="1200" dirty="0">
+                <a:solidFill>
+                  <a:srgbClr val="1C2833"/>
+                </a:solidFill>
+                <a:latin typeface="Arial" pitchFamily="34" charset="0"/>
+                <a:ea typeface="Arial" pitchFamily="34" charset="-122"/>
+                <a:cs typeface="Arial" pitchFamily="34" charset="-120"/>
+              </a:rPr>
+              <a:t> dosha tilt. Note: this is a snapshot, not your identity.</a:t>
+            </a:r>
+            <a:endParaRPr lang="en-US" sz="1200" dirty="0"/>
+          </a:p>
+        </p:txBody>
+      </p:sp>
+      <p:sp>
+        <p:nvSpPr>
+          <p:cNvPr id="7" name="Text 5"/>
           <p:cNvSpPr/>
           <p:nvPr/>
         </p:nvSpPr>
@@ -2562,7 +3008,7 @@
                 <a:ea typeface="Georgia" pitchFamily="34" charset="-122"/>
                 <a:cs typeface="Georgia" pitchFamily="34" charset="-120"/>
               </a:rPr>
-              <a:t>Teacher notes</a:t>
+              <a:t>Discussion (15 min)</a:t>
             </a:r>
             <a:endParaRPr lang="en-US" sz="1800" dirty="0"/>
           </a:p>
@@ -2576,8 +3022,8 @@
         </p:nvSpPr>
         <p:spPr>
           <a:xfrm>
-            <a:off x="406301" y="870942"/>
-            <a:ext cx="8498026" cy="426541"/>
+            <a:off x="634901" y="883593"/>
+            <a:ext cx="8102798" cy="769441"/>
           </a:xfrm>
           <a:prstGeom prst="rect">
             <a:avLst/>
@@ -2589,17 +3035,83 @@
           <a:bodyPr wrap="square" lIns="0" tIns="0" rIns="0" bIns="0" rtlCol="0" anchor="t"/>
           <a:lstStyle/>
           <a:p>
+            <a:pPr algn="l" marL="342900" indent="-342900">
+              <a:lnSpc>
+                <a:spcPts val="1620"/>
+              </a:lnSpc>
+              <a:spcAft>
+                <a:spcPts val="300"/>
+              </a:spcAft>
+              <a:buSzPct val="100000"/>
+              <a:buChar char="•"/>
+            </a:pPr>
+            <a:r>
+              <a:rPr lang="en-US" sz="1200" dirty="0">
+                <a:solidFill>
+                  <a:srgbClr val="1C2833"/>
+                </a:solidFill>
+                <a:latin typeface="Arial" pitchFamily="34" charset="0"/>
+                <a:ea typeface="Arial" pitchFamily="34" charset="-122"/>
+                <a:cs typeface="Arial" pitchFamily="34" charset="-120"/>
+              </a:rPr>
+              <a:t>Share-of-hands: how many are predominantly Vāta? Pitta? Kapha? Mixed?</a:t>
+            </a:r>
+            <a:endParaRPr lang="en-US" sz="1200" dirty="0"/>
+          </a:p>
+          <a:p>
+            <a:pPr algn="l" marL="342900" indent="-342900">
+              <a:lnSpc>
+                <a:spcPts val="1620"/>
+              </a:lnSpc>
+              <a:spcAft>
+                <a:spcPts val="300"/>
+              </a:spcAft>
+              <a:buSzPct val="100000"/>
+              <a:buChar char="•"/>
+            </a:pPr>
+            <a:r>
+              <a:rPr lang="en-US" sz="1200" dirty="0">
+                <a:solidFill>
+                  <a:srgbClr val="1C2833"/>
+                </a:solidFill>
+                <a:latin typeface="Arial" pitchFamily="34" charset="0"/>
+                <a:ea typeface="Arial" pitchFamily="34" charset="-122"/>
+                <a:cs typeface="Arial" pitchFamily="34" charset="-120"/>
+              </a:rPr>
+              <a:t>Reinforce: </a:t>
+            </a:r>
             <a:pPr algn="l" indent="0" marL="0">
               <a:lnSpc>
-                <a:spcPts val="1680"/>
-              </a:lnSpc>
-              <a:spcBef>
-                <a:spcPts val="300"/>
-              </a:spcBef>
-              <a:spcAft>
-                <a:spcPts val="300"/>
-              </a:spcAft>
-              <a:buNone/>
+                <a:spcPts val="1620"/>
+              </a:lnSpc>
+              <a:spcAft>
+                <a:spcPts val="300"/>
+              </a:spcAft>
+              <a:buNone/>
+            </a:pPr>
+            <a:r>
+              <a:rPr lang="en-US" sz="1200" i="1" dirty="0">
+                <a:solidFill>
+                  <a:srgbClr val="1C2833"/>
+                </a:solidFill>
+                <a:latin typeface="Arial" pitchFamily="34" charset="0"/>
+                <a:ea typeface="Arial" pitchFamily="34" charset="-122"/>
+                <a:cs typeface="Arial" pitchFamily="34" charset="-120"/>
+              </a:rPr>
+              <a:t>"This is a tendency observation, not a verdict."</a:t>
+            </a:r>
+            <a:endParaRPr lang="en-US" sz="1200" dirty="0"/>
+          </a:p>
+          <a:p>
+            <a:pPr algn="l" marL="342900" indent="-342900">
+              <a:lnSpc>
+                <a:spcPts val="1620"/>
+              </a:lnSpc>
+              <a:spcAft>
+                <a:spcPts val="300"/>
+              </a:spcAft>
+              <a:buSzPct val="100000"/>
+              <a:buChar char="•"/>
             </a:pPr>
             <a:r>
               <a:rPr lang="en-US" sz="1200" dirty="0">
@@ -2610,53 +3122,7 @@
                 <a:ea typeface="Arial" pitchFamily="34" charset="-122"/>
                 <a:cs typeface="Arial" pitchFamily="34" charset="-120"/>
               </a:rPr>
-              <a:t>– Some students will be deeply invested in "their type." Gently redirect: </a:t>
-            </a:r>
-            <a:pPr algn="l" indent="0" marL="0">
-              <a:lnSpc>
-                <a:spcPts val="1680"/>
-              </a:lnSpc>
-              <a:spcBef>
-                <a:spcPts val="300"/>
-              </a:spcBef>
-              <a:spcAft>
-                <a:spcPts val="300"/>
-              </a:spcAft>
-              <a:buNone/>
-            </a:pPr>
-            <a:r>
-              <a:rPr lang="en-US" sz="1200" i="1" dirty="0">
-                <a:solidFill>
-                  <a:srgbClr val="1C2833"/>
-                </a:solidFill>
-                <a:latin typeface="Arial" pitchFamily="34" charset="0"/>
-                <a:ea typeface="Arial" pitchFamily="34" charset="-122"/>
-                <a:cs typeface="Arial" pitchFamily="34" charset="-120"/>
-              </a:rPr>
-              <a:t>"It's a tool, not a label."</a:t>
-            </a:r>
-            <a:pPr algn="l" indent="0" marL="0">
-              <a:lnSpc>
-                <a:spcPts val="1680"/>
-              </a:lnSpc>
-              <a:spcBef>
-                <a:spcPts val="300"/>
-              </a:spcBef>
-              <a:spcAft>
-                <a:spcPts val="300"/>
-              </a:spcAft>
-              <a:buNone/>
-            </a:pPr>
-            <a:r>
-              <a:rPr lang="en-US" sz="1200" dirty="0">
-                <a:solidFill>
-                  <a:srgbClr val="1C2833"/>
-                </a:solidFill>
-                <a:latin typeface="Arial" pitchFamily="34" charset="0"/>
-                <a:ea typeface="Arial" pitchFamily="34" charset="-122"/>
-                <a:cs typeface="Arial" pitchFamily="34" charset="-120"/>
-              </a:rPr>
-              <a:t> – The framework correlates loosely with body-type psychology (Sheldon's somatotypes, for example). Senior students engage this comparison.</a:t>
+              <a:t>Discuss: did anyone get a result that surprised them?</a:t>
             </a:r>
             <a:endParaRPr lang="en-US" sz="1200" dirty="0"/>
           </a:p>
@@ -2814,6 +3280,950 @@
                 <a:ea typeface="Georgia" pitchFamily="34" charset="-122"/>
                 <a:cs typeface="Georgia" pitchFamily="34" charset="-120"/>
               </a:rPr>
+              <a:t>Wrap-up (5 min)</a:t>
+            </a:r>
+            <a:endParaRPr lang="en-US" sz="1800" dirty="0"/>
+          </a:p>
+        </p:txBody>
+      </p:sp>
+      <p:sp>
+        <p:nvSpPr>
+          <p:cNvPr id="4" name="Text 2"/>
+          <p:cNvSpPr/>
+          <p:nvPr/>
+        </p:nvSpPr>
+        <p:spPr>
+          <a:xfrm>
+            <a:off x="634901" y="883593"/>
+            <a:ext cx="8102798" cy="487561"/>
+          </a:xfrm>
+          <a:prstGeom prst="rect">
+            <a:avLst/>
+          </a:prstGeom>
+          <a:noFill/>
+          <a:ln/>
+        </p:spPr>
+        <p:txBody>
+          <a:bodyPr wrap="square" lIns="0" tIns="0" rIns="0" bIns="0" rtlCol="0" anchor="t"/>
+          <a:lstStyle/>
+          <a:p>
+            <a:pPr algn="l" marL="342900" indent="-342900">
+              <a:lnSpc>
+                <a:spcPts val="1620"/>
+              </a:lnSpc>
+              <a:spcAft>
+                <a:spcPts val="300"/>
+              </a:spcAft>
+              <a:buSzPct val="100000"/>
+              <a:buChar char="•"/>
+            </a:pPr>
+            <a:r>
+              <a:rPr lang="en-US" sz="1200" dirty="0">
+                <a:solidFill>
+                  <a:srgbClr val="1C2833"/>
+                </a:solidFill>
+                <a:latin typeface="Arial" pitchFamily="34" charset="0"/>
+                <a:ea typeface="Arial" pitchFamily="34" charset="-122"/>
+                <a:cs typeface="Arial" pitchFamily="34" charset="-120"/>
+              </a:rPr>
+              <a:t>Preview Day 4: </a:t>
+            </a:r>
+            <a:pPr algn="l" indent="0" marL="0">
+              <a:lnSpc>
+                <a:spcPts val="1620"/>
+              </a:lnSpc>
+              <a:spcAft>
+                <a:spcPts val="300"/>
+              </a:spcAft>
+              <a:buNone/>
+            </a:pPr>
+            <a:r>
+              <a:rPr lang="en-US" sz="1200" i="1" dirty="0">
+                <a:solidFill>
+                  <a:srgbClr val="1C2833"/>
+                </a:solidFill>
+                <a:latin typeface="Arial" pitchFamily="34" charset="0"/>
+                <a:ea typeface="Arial" pitchFamily="34" charset="-122"/>
+                <a:cs typeface="Arial" pitchFamily="34" charset="-120"/>
+              </a:rPr>
+              <a:t>"Tomorrow — Dinacharya. The daily routine that tradition recommends for keeping all three doshas in balance."</a:t>
+            </a:r>
+            <a:endParaRPr lang="en-US" sz="1200" dirty="0"/>
+          </a:p>
+        </p:txBody>
+      </p:sp>
+      <p:sp>
+        <p:nvSpPr>
+          <p:cNvPr id="5" name="Text 3"/>
+          <p:cNvSpPr/>
+          <p:nvPr/>
+        </p:nvSpPr>
+        <p:spPr>
+          <a:xfrm>
+            <a:off x="406301" y="4434929"/>
+            <a:ext cx="8498026" cy="213271"/>
+          </a:xfrm>
+          <a:prstGeom prst="rect">
+            <a:avLst/>
+          </a:prstGeom>
+          <a:noFill/>
+          <a:ln/>
+        </p:spPr>
+        <p:txBody>
+          <a:bodyPr wrap="square" lIns="0" tIns="0" rIns="0" bIns="0" rtlCol="0" anchor="t"/>
+          <a:lstStyle/>
+          <a:p>
+            <a:pPr algn="l" indent="0" marL="0">
+              <a:lnSpc>
+                <a:spcPts val="1680"/>
+              </a:lnSpc>
+              <a:spcBef>
+                <a:spcPts val="300"/>
+              </a:spcBef>
+              <a:spcAft>
+                <a:spcPts val="300"/>
+              </a:spcAft>
+              <a:buNone/>
+            </a:pPr>
+            <a:r>
+              <a:rPr lang="en-US" sz="1200" dirty="0">
+                <a:solidFill>
+                  <a:srgbClr val="1C2833"/>
+                </a:solidFill>
+                <a:latin typeface="Arial" pitchFamily="34" charset="0"/>
+                <a:ea typeface="Arial" pitchFamily="34" charset="-122"/>
+                <a:cs typeface="Arial" pitchFamily="34" charset="-120"/>
+              </a:rPr>
+              <a:t>Middle ·  · IKS Curriculum</a:t>
+            </a:r>
+            <a:endParaRPr lang="en-US" sz="1200" dirty="0"/>
+          </a:p>
+        </p:txBody>
+      </p:sp>
+    </p:spTree>
+  </p:cSld>
+  <p:clrMapOvr>
+    <a:masterClrMapping/>
+  </p:clrMapOvr>
+</p:sld>
+</file>
+
+<file path=ppt/slides/slide13.xml><?xml version="1.0" encoding="utf-8"?>
+<p:sld xmlns:a="http://schemas.openxmlformats.org/drawingml/2006/main" xmlns:r="http://schemas.openxmlformats.org/officeDocument/2006/relationships" xmlns:p="http://schemas.openxmlformats.org/presentationml/2006/main">
+  <p:cSld name="Slide 13">
+    <p:bg>
+      <p:bgPr>
+        <a:solidFill>
+          <a:srgbClr val="FFFFFF"/>
+        </a:solidFill>
+      </p:bgPr>
+    </p:bg>
+    <p:spTree>
+      <p:nvGrpSpPr>
+        <p:cNvPr id="1" name=""/>
+        <p:cNvGrpSpPr/>
+        <p:nvPr/>
+      </p:nvGrpSpPr>
+      <p:grpSpPr>
+        <a:xfrm>
+          <a:off x="0" y="0"/>
+          <a:ext cx="0" cy="0"/>
+          <a:chOff x="0" y="0"/>
+          <a:chExt cx="0" cy="0"/>
+        </a:xfrm>
+      </p:grpSpPr>
+      <p:sp>
+        <p:nvSpPr>
+          <p:cNvPr id="2" name="Text 0"/>
+          <p:cNvSpPr/>
+          <p:nvPr/>
+        </p:nvSpPr>
+        <p:spPr>
+          <a:xfrm>
+            <a:off x="0" y="0"/>
+            <a:ext cx="9144000" cy="101501"/>
+          </a:xfrm>
+          <a:prstGeom prst="rect">
+            <a:avLst/>
+          </a:prstGeom>
+          <a:solidFill>
+            <a:srgbClr val="277884"/>
+          </a:solidFill>
+          <a:ln/>
+        </p:spPr>
+        <p:txBody>
+          <a:bodyPr wrap="square" rtlCol="0" anchor="ctr"/>
+          <a:lstStyle/>
+          <a:p>
+            <a:pPr indent="0" marL="0">
+              <a:buNone/>
+            </a:pPr>
+            <a:endParaRPr lang="en-US" dirty="0"/>
+          </a:p>
+        </p:txBody>
+      </p:sp>
+      <p:sp>
+        <p:nvSpPr>
+          <p:cNvPr id="3" name="Text 1"/>
+          <p:cNvSpPr/>
+          <p:nvPr/>
+        </p:nvSpPr>
+        <p:spPr>
+          <a:xfrm>
+            <a:off x="406301" y="457051"/>
+            <a:ext cx="8498026" cy="274290"/>
+          </a:xfrm>
+          <a:prstGeom prst="rect">
+            <a:avLst/>
+          </a:prstGeom>
+          <a:noFill/>
+          <a:ln/>
+        </p:spPr>
+        <p:txBody>
+          <a:bodyPr wrap="square" lIns="0" tIns="0" rIns="0" bIns="0" rtlCol="0" anchor="t"/>
+          <a:lstStyle/>
+          <a:p>
+            <a:pPr algn="l" indent="0" marL="0">
+              <a:lnSpc>
+                <a:spcPts val="2160"/>
+              </a:lnSpc>
+              <a:spcBef>
+                <a:spcPts val="600"/>
+              </a:spcBef>
+              <a:spcAft>
+                <a:spcPts val="800"/>
+              </a:spcAft>
+              <a:buNone/>
+            </a:pPr>
+            <a:r>
+              <a:rPr lang="en-US" sz="1800" b="1" dirty="0">
+                <a:solidFill>
+                  <a:srgbClr val="FE4447"/>
+                </a:solidFill>
+                <a:latin typeface="Georgia" pitchFamily="34" charset="0"/>
+                <a:ea typeface="Georgia" pitchFamily="34" charset="-122"/>
+                <a:cs typeface="Georgia" pitchFamily="34" charset="-120"/>
+              </a:rPr>
+              <a:t>Homework</a:t>
+            </a:r>
+            <a:endParaRPr lang="en-US" sz="1800" dirty="0"/>
+          </a:p>
+        </p:txBody>
+      </p:sp>
+      <p:sp>
+        <p:nvSpPr>
+          <p:cNvPr id="4" name="Text 2"/>
+          <p:cNvSpPr/>
+          <p:nvPr/>
+        </p:nvSpPr>
+        <p:spPr>
+          <a:xfrm>
+            <a:off x="634901" y="883593"/>
+            <a:ext cx="8102798" cy="487561"/>
+          </a:xfrm>
+          <a:prstGeom prst="rect">
+            <a:avLst/>
+          </a:prstGeom>
+          <a:noFill/>
+          <a:ln/>
+        </p:spPr>
+        <p:txBody>
+          <a:bodyPr wrap="square" lIns="0" tIns="0" rIns="0" bIns="0" rtlCol="0" anchor="t"/>
+          <a:lstStyle/>
+          <a:p>
+            <a:pPr algn="l" marL="342900" indent="-342900">
+              <a:lnSpc>
+                <a:spcPts val="1620"/>
+              </a:lnSpc>
+              <a:spcAft>
+                <a:spcPts val="300"/>
+              </a:spcAft>
+              <a:buSzPct val="100000"/>
+              <a:buChar char="•"/>
+            </a:pPr>
+            <a:r>
+              <a:rPr lang="en-US" sz="1200" dirty="0">
+                <a:solidFill>
+                  <a:srgbClr val="1C2833"/>
+                </a:solidFill>
+                <a:latin typeface="Arial" pitchFamily="34" charset="0"/>
+                <a:ea typeface="Arial" pitchFamily="34" charset="-122"/>
+                <a:cs typeface="Arial" pitchFamily="34" charset="-120"/>
+              </a:rPr>
+              <a:t>Look up ONE Ayurvedic recommendation for your dominant dosha (food, sleep timing, type of exercise). Bring tomorrow.</a:t>
+            </a:r>
+            <a:endParaRPr lang="en-US" sz="1200" dirty="0"/>
+          </a:p>
+        </p:txBody>
+      </p:sp>
+      <p:sp>
+        <p:nvSpPr>
+          <p:cNvPr id="5" name="Text 3"/>
+          <p:cNvSpPr/>
+          <p:nvPr/>
+        </p:nvSpPr>
+        <p:spPr>
+          <a:xfrm>
+            <a:off x="406301" y="4434929"/>
+            <a:ext cx="8498026" cy="213271"/>
+          </a:xfrm>
+          <a:prstGeom prst="rect">
+            <a:avLst/>
+          </a:prstGeom>
+          <a:noFill/>
+          <a:ln/>
+        </p:spPr>
+        <p:txBody>
+          <a:bodyPr wrap="square" lIns="0" tIns="0" rIns="0" bIns="0" rtlCol="0" anchor="t"/>
+          <a:lstStyle/>
+          <a:p>
+            <a:pPr algn="l" indent="0" marL="0">
+              <a:lnSpc>
+                <a:spcPts val="1680"/>
+              </a:lnSpc>
+              <a:spcBef>
+                <a:spcPts val="300"/>
+              </a:spcBef>
+              <a:spcAft>
+                <a:spcPts val="300"/>
+              </a:spcAft>
+              <a:buNone/>
+            </a:pPr>
+            <a:r>
+              <a:rPr lang="en-US" sz="1200" dirty="0">
+                <a:solidFill>
+                  <a:srgbClr val="1C2833"/>
+                </a:solidFill>
+                <a:latin typeface="Arial" pitchFamily="34" charset="0"/>
+                <a:ea typeface="Arial" pitchFamily="34" charset="-122"/>
+                <a:cs typeface="Arial" pitchFamily="34" charset="-120"/>
+              </a:rPr>
+              <a:t>Middle ·  · IKS Curriculum</a:t>
+            </a:r>
+            <a:endParaRPr lang="en-US" sz="1200" dirty="0"/>
+          </a:p>
+        </p:txBody>
+      </p:sp>
+    </p:spTree>
+  </p:cSld>
+  <p:clrMapOvr>
+    <a:masterClrMapping/>
+  </p:clrMapOvr>
+</p:sld>
+</file>
+
+<file path=ppt/slides/slide14.xml><?xml version="1.0" encoding="utf-8"?>
+<p:sld xmlns:a="http://schemas.openxmlformats.org/drawingml/2006/main" xmlns:r="http://schemas.openxmlformats.org/officeDocument/2006/relationships" xmlns:p="http://schemas.openxmlformats.org/presentationml/2006/main">
+  <p:cSld name="Slide 14">
+    <p:bg>
+      <p:bgPr>
+        <a:solidFill>
+          <a:srgbClr val="FFFFFF"/>
+        </a:solidFill>
+      </p:bgPr>
+    </p:bg>
+    <p:spTree>
+      <p:nvGrpSpPr>
+        <p:cNvPr id="1" name=""/>
+        <p:cNvGrpSpPr/>
+        <p:nvPr/>
+      </p:nvGrpSpPr>
+      <p:grpSpPr>
+        <a:xfrm>
+          <a:off x="0" y="0"/>
+          <a:ext cx="0" cy="0"/>
+          <a:chOff x="0" y="0"/>
+          <a:chExt cx="0" cy="0"/>
+        </a:xfrm>
+      </p:grpSpPr>
+      <p:sp>
+        <p:nvSpPr>
+          <p:cNvPr id="2" name="Text 0"/>
+          <p:cNvSpPr/>
+          <p:nvPr/>
+        </p:nvSpPr>
+        <p:spPr>
+          <a:xfrm>
+            <a:off x="0" y="0"/>
+            <a:ext cx="9144000" cy="101501"/>
+          </a:xfrm>
+          <a:prstGeom prst="rect">
+            <a:avLst/>
+          </a:prstGeom>
+          <a:solidFill>
+            <a:srgbClr val="277884"/>
+          </a:solidFill>
+          <a:ln/>
+        </p:spPr>
+        <p:txBody>
+          <a:bodyPr wrap="square" rtlCol="0" anchor="ctr"/>
+          <a:lstStyle/>
+          <a:p>
+            <a:pPr indent="0" marL="0">
+              <a:buNone/>
+            </a:pPr>
+            <a:endParaRPr lang="en-US" dirty="0"/>
+          </a:p>
+        </p:txBody>
+      </p:sp>
+      <p:sp>
+        <p:nvSpPr>
+          <p:cNvPr id="3" name="Text 1"/>
+          <p:cNvSpPr/>
+          <p:nvPr/>
+        </p:nvSpPr>
+        <p:spPr>
+          <a:xfrm>
+            <a:off x="406301" y="457051"/>
+            <a:ext cx="8498026" cy="274290"/>
+          </a:xfrm>
+          <a:prstGeom prst="rect">
+            <a:avLst/>
+          </a:prstGeom>
+          <a:noFill/>
+          <a:ln/>
+        </p:spPr>
+        <p:txBody>
+          <a:bodyPr wrap="square" lIns="0" tIns="0" rIns="0" bIns="0" rtlCol="0" anchor="t"/>
+          <a:lstStyle/>
+          <a:p>
+            <a:pPr algn="l" indent="0" marL="0">
+              <a:lnSpc>
+                <a:spcPts val="2160"/>
+              </a:lnSpc>
+              <a:spcBef>
+                <a:spcPts val="600"/>
+              </a:spcBef>
+              <a:spcAft>
+                <a:spcPts val="800"/>
+              </a:spcAft>
+              <a:buNone/>
+            </a:pPr>
+            <a:r>
+              <a:rPr lang="en-US" sz="1800" b="1" dirty="0">
+                <a:solidFill>
+                  <a:srgbClr val="FE4447"/>
+                </a:solidFill>
+                <a:latin typeface="Georgia" pitchFamily="34" charset="0"/>
+                <a:ea typeface="Georgia" pitchFamily="34" charset="-122"/>
+                <a:cs typeface="Georgia" pitchFamily="34" charset="-120"/>
+              </a:rPr>
+              <a:t>Differentiation</a:t>
+            </a:r>
+            <a:endParaRPr lang="en-US" sz="1800" dirty="0"/>
+          </a:p>
+        </p:txBody>
+      </p:sp>
+      <p:sp>
+        <p:nvSpPr>
+          <p:cNvPr id="4" name="Text 2"/>
+          <p:cNvSpPr/>
+          <p:nvPr/>
+        </p:nvSpPr>
+        <p:spPr>
+          <a:xfrm>
+            <a:off x="634901" y="883593"/>
+            <a:ext cx="8102798" cy="525661"/>
+          </a:xfrm>
+          <a:prstGeom prst="rect">
+            <a:avLst/>
+          </a:prstGeom>
+          <a:noFill/>
+          <a:ln/>
+        </p:spPr>
+        <p:txBody>
+          <a:bodyPr wrap="square" lIns="0" tIns="0" rIns="0" bIns="0" rtlCol="0" anchor="t"/>
+          <a:lstStyle/>
+          <a:p>
+            <a:pPr algn="l" marL="342900" indent="-342900">
+              <a:lnSpc>
+                <a:spcPts val="1620"/>
+              </a:lnSpc>
+              <a:spcAft>
+                <a:spcPts val="300"/>
+              </a:spcAft>
+              <a:buSzPct val="100000"/>
+              <a:buChar char="•"/>
+            </a:pPr>
+            <a:r>
+              <a:rPr lang="en-US" sz="1200" b="1" dirty="0">
+                <a:solidFill>
+                  <a:srgbClr val="1C2833"/>
+                </a:solidFill>
+                <a:latin typeface="Arial" pitchFamily="34" charset="0"/>
+                <a:ea typeface="Arial" pitchFamily="34" charset="-122"/>
+                <a:cs typeface="Arial" pitchFamily="34" charset="-120"/>
+              </a:rPr>
+              <a:t>Tier up:</a:t>
+            </a:r>
+            <a:pPr algn="l" indent="0" marL="0">
+              <a:lnSpc>
+                <a:spcPts val="1620"/>
+              </a:lnSpc>
+              <a:spcAft>
+                <a:spcPts val="300"/>
+              </a:spcAft>
+              <a:buNone/>
+            </a:pPr>
+            <a:r>
+              <a:rPr lang="en-US" sz="1200" dirty="0">
+                <a:solidFill>
+                  <a:srgbClr val="1C2833"/>
+                </a:solidFill>
+                <a:latin typeface="Arial" pitchFamily="34" charset="0"/>
+                <a:ea typeface="Arial" pitchFamily="34" charset="-122"/>
+                <a:cs typeface="Arial" pitchFamily="34" charset="-120"/>
+              </a:rPr>
+              <a:t> Notice your result; do you AGREE? If not, why might the framework miss?</a:t>
+            </a:r>
+            <a:endParaRPr lang="en-US" sz="1200" dirty="0"/>
+          </a:p>
+          <a:p>
+            <a:pPr algn="l" marL="342900" indent="-342900">
+              <a:lnSpc>
+                <a:spcPts val="1620"/>
+              </a:lnSpc>
+              <a:spcAft>
+                <a:spcPts val="300"/>
+              </a:spcAft>
+              <a:buSzPct val="100000"/>
+              <a:buChar char="•"/>
+            </a:pPr>
+            <a:r>
+              <a:rPr lang="en-US" sz="1200" b="1" dirty="0">
+                <a:solidFill>
+                  <a:srgbClr val="1C2833"/>
+                </a:solidFill>
+                <a:latin typeface="Arial" pitchFamily="34" charset="0"/>
+                <a:ea typeface="Arial" pitchFamily="34" charset="-122"/>
+                <a:cs typeface="Arial" pitchFamily="34" charset="-120"/>
+              </a:rPr>
+              <a:t>Tier down:</a:t>
+            </a:r>
+            <a:pPr algn="l" indent="0" marL="0">
+              <a:lnSpc>
+                <a:spcPts val="1620"/>
+              </a:lnSpc>
+              <a:spcAft>
+                <a:spcPts val="300"/>
+              </a:spcAft>
+              <a:buNone/>
+            </a:pPr>
+            <a:r>
+              <a:rPr lang="en-US" sz="1200" dirty="0">
+                <a:solidFill>
+                  <a:srgbClr val="1C2833"/>
+                </a:solidFill>
+                <a:latin typeface="Arial" pitchFamily="34" charset="0"/>
+                <a:ea typeface="Arial" pitchFamily="34" charset="-122"/>
+                <a:cs typeface="Arial" pitchFamily="34" charset="-120"/>
+              </a:rPr>
+              <a:t> Focus on Q1–6; skip Q7–12.</a:t>
+            </a:r>
+            <a:endParaRPr lang="en-US" sz="1200" dirty="0"/>
+          </a:p>
+        </p:txBody>
+      </p:sp>
+      <p:sp>
+        <p:nvSpPr>
+          <p:cNvPr id="5" name="Text 3"/>
+          <p:cNvSpPr/>
+          <p:nvPr/>
+        </p:nvSpPr>
+        <p:spPr>
+          <a:xfrm>
+            <a:off x="406301" y="4434929"/>
+            <a:ext cx="8498026" cy="213271"/>
+          </a:xfrm>
+          <a:prstGeom prst="rect">
+            <a:avLst/>
+          </a:prstGeom>
+          <a:noFill/>
+          <a:ln/>
+        </p:spPr>
+        <p:txBody>
+          <a:bodyPr wrap="square" lIns="0" tIns="0" rIns="0" bIns="0" rtlCol="0" anchor="t"/>
+          <a:lstStyle/>
+          <a:p>
+            <a:pPr algn="l" indent="0" marL="0">
+              <a:lnSpc>
+                <a:spcPts val="1680"/>
+              </a:lnSpc>
+              <a:spcBef>
+                <a:spcPts val="300"/>
+              </a:spcBef>
+              <a:spcAft>
+                <a:spcPts val="300"/>
+              </a:spcAft>
+              <a:buNone/>
+            </a:pPr>
+            <a:r>
+              <a:rPr lang="en-US" sz="1200" dirty="0">
+                <a:solidFill>
+                  <a:srgbClr val="1C2833"/>
+                </a:solidFill>
+                <a:latin typeface="Arial" pitchFamily="34" charset="0"/>
+                <a:ea typeface="Arial" pitchFamily="34" charset="-122"/>
+                <a:cs typeface="Arial" pitchFamily="34" charset="-120"/>
+              </a:rPr>
+              <a:t>Middle ·  · IKS Curriculum</a:t>
+            </a:r>
+            <a:endParaRPr lang="en-US" sz="1200" dirty="0"/>
+          </a:p>
+        </p:txBody>
+      </p:sp>
+    </p:spTree>
+  </p:cSld>
+  <p:clrMapOvr>
+    <a:masterClrMapping/>
+  </p:clrMapOvr>
+</p:sld>
+</file>
+
+<file path=ppt/slides/slide15.xml><?xml version="1.0" encoding="utf-8"?>
+<p:sld xmlns:a="http://schemas.openxmlformats.org/drawingml/2006/main" xmlns:r="http://schemas.openxmlformats.org/officeDocument/2006/relationships" xmlns:p="http://schemas.openxmlformats.org/presentationml/2006/main">
+  <p:cSld name="Slide 15">
+    <p:bg>
+      <p:bgPr>
+        <a:solidFill>
+          <a:srgbClr val="FFFFFF"/>
+        </a:solidFill>
+      </p:bgPr>
+    </p:bg>
+    <p:spTree>
+      <p:nvGrpSpPr>
+        <p:cNvPr id="1" name=""/>
+        <p:cNvGrpSpPr/>
+        <p:nvPr/>
+      </p:nvGrpSpPr>
+      <p:grpSpPr>
+        <a:xfrm>
+          <a:off x="0" y="0"/>
+          <a:ext cx="0" cy="0"/>
+          <a:chOff x="0" y="0"/>
+          <a:chExt cx="0" cy="0"/>
+        </a:xfrm>
+      </p:grpSpPr>
+      <p:sp>
+        <p:nvSpPr>
+          <p:cNvPr id="2" name="Text 0"/>
+          <p:cNvSpPr/>
+          <p:nvPr/>
+        </p:nvSpPr>
+        <p:spPr>
+          <a:xfrm>
+            <a:off x="0" y="0"/>
+            <a:ext cx="9144000" cy="101501"/>
+          </a:xfrm>
+          <a:prstGeom prst="rect">
+            <a:avLst/>
+          </a:prstGeom>
+          <a:solidFill>
+            <a:srgbClr val="277884"/>
+          </a:solidFill>
+          <a:ln/>
+        </p:spPr>
+        <p:txBody>
+          <a:bodyPr wrap="square" rtlCol="0" anchor="ctr"/>
+          <a:lstStyle/>
+          <a:p>
+            <a:pPr indent="0" marL="0">
+              <a:buNone/>
+            </a:pPr>
+            <a:endParaRPr lang="en-US" dirty="0"/>
+          </a:p>
+        </p:txBody>
+      </p:sp>
+      <p:sp>
+        <p:nvSpPr>
+          <p:cNvPr id="3" name="Text 1"/>
+          <p:cNvSpPr/>
+          <p:nvPr/>
+        </p:nvSpPr>
+        <p:spPr>
+          <a:xfrm>
+            <a:off x="406301" y="457051"/>
+            <a:ext cx="8498026" cy="274290"/>
+          </a:xfrm>
+          <a:prstGeom prst="rect">
+            <a:avLst/>
+          </a:prstGeom>
+          <a:noFill/>
+          <a:ln/>
+        </p:spPr>
+        <p:txBody>
+          <a:bodyPr wrap="square" lIns="0" tIns="0" rIns="0" bIns="0" rtlCol="0" anchor="t"/>
+          <a:lstStyle/>
+          <a:p>
+            <a:pPr algn="l" indent="0" marL="0">
+              <a:lnSpc>
+                <a:spcPts val="2160"/>
+              </a:lnSpc>
+              <a:spcBef>
+                <a:spcPts val="600"/>
+              </a:spcBef>
+              <a:spcAft>
+                <a:spcPts val="800"/>
+              </a:spcAft>
+              <a:buNone/>
+            </a:pPr>
+            <a:r>
+              <a:rPr lang="en-US" sz="1800" b="1" dirty="0">
+                <a:solidFill>
+                  <a:srgbClr val="FE4447"/>
+                </a:solidFill>
+                <a:latin typeface="Georgia" pitchFamily="34" charset="0"/>
+                <a:ea typeface="Georgia" pitchFamily="34" charset="-122"/>
+                <a:cs typeface="Georgia" pitchFamily="34" charset="-120"/>
+              </a:rPr>
+              <a:t>Teacher notes</a:t>
+            </a:r>
+            <a:endParaRPr lang="en-US" sz="1800" dirty="0"/>
+          </a:p>
+        </p:txBody>
+      </p:sp>
+      <p:sp>
+        <p:nvSpPr>
+          <p:cNvPr id="4" name="Text 2"/>
+          <p:cNvSpPr/>
+          <p:nvPr/>
+        </p:nvSpPr>
+        <p:spPr>
+          <a:xfrm>
+            <a:off x="634901" y="883593"/>
+            <a:ext cx="8102798" cy="731341"/>
+          </a:xfrm>
+          <a:prstGeom prst="rect">
+            <a:avLst/>
+          </a:prstGeom>
+          <a:noFill/>
+          <a:ln/>
+        </p:spPr>
+        <p:txBody>
+          <a:bodyPr wrap="square" lIns="0" tIns="0" rIns="0" bIns="0" rtlCol="0" anchor="t"/>
+          <a:lstStyle/>
+          <a:p>
+            <a:pPr algn="l" marL="342900" indent="-342900">
+              <a:lnSpc>
+                <a:spcPts val="1620"/>
+              </a:lnSpc>
+              <a:spcAft>
+                <a:spcPts val="300"/>
+              </a:spcAft>
+              <a:buSzPct val="100000"/>
+              <a:buChar char="•"/>
+            </a:pPr>
+            <a:r>
+              <a:rPr lang="en-US" sz="1200" dirty="0">
+                <a:solidFill>
+                  <a:srgbClr val="1C2833"/>
+                </a:solidFill>
+                <a:latin typeface="Arial" pitchFamily="34" charset="0"/>
+                <a:ea typeface="Arial" pitchFamily="34" charset="-122"/>
+                <a:cs typeface="Arial" pitchFamily="34" charset="-120"/>
+              </a:rPr>
+              <a:t>Some students will be deeply invested in "their type." Gently redirect: </a:t>
+            </a:r>
+            <a:pPr algn="l" indent="0" marL="0">
+              <a:lnSpc>
+                <a:spcPts val="1620"/>
+              </a:lnSpc>
+              <a:spcAft>
+                <a:spcPts val="300"/>
+              </a:spcAft>
+              <a:buNone/>
+            </a:pPr>
+            <a:r>
+              <a:rPr lang="en-US" sz="1200" i="1" dirty="0">
+                <a:solidFill>
+                  <a:srgbClr val="1C2833"/>
+                </a:solidFill>
+                <a:latin typeface="Arial" pitchFamily="34" charset="0"/>
+                <a:ea typeface="Arial" pitchFamily="34" charset="-122"/>
+                <a:cs typeface="Arial" pitchFamily="34" charset="-120"/>
+              </a:rPr>
+              <a:t>"It's a tool, not a label."</a:t>
+            </a:r>
+            <a:endParaRPr lang="en-US" sz="1200" dirty="0"/>
+          </a:p>
+          <a:p>
+            <a:pPr algn="l" marL="342900" indent="-342900">
+              <a:lnSpc>
+                <a:spcPts val="1620"/>
+              </a:lnSpc>
+              <a:spcAft>
+                <a:spcPts val="300"/>
+              </a:spcAft>
+              <a:buSzPct val="100000"/>
+              <a:buChar char="•"/>
+            </a:pPr>
+            <a:r>
+              <a:rPr lang="en-US" sz="1200" dirty="0">
+                <a:solidFill>
+                  <a:srgbClr val="1C2833"/>
+                </a:solidFill>
+                <a:latin typeface="Arial" pitchFamily="34" charset="0"/>
+                <a:ea typeface="Arial" pitchFamily="34" charset="-122"/>
+                <a:cs typeface="Arial" pitchFamily="34" charset="-120"/>
+              </a:rPr>
+              <a:t>The framework correlates loosely with body-type psychology (Sheldon's somatotypes, for example). Senior students engage this comparison.</a:t>
+            </a:r>
+            <a:endParaRPr lang="en-US" sz="1200" dirty="0"/>
+          </a:p>
+        </p:txBody>
+      </p:sp>
+      <p:sp>
+        <p:nvSpPr>
+          <p:cNvPr id="5" name="Text 3"/>
+          <p:cNvSpPr/>
+          <p:nvPr/>
+        </p:nvSpPr>
+        <p:spPr>
+          <a:xfrm>
+            <a:off x="406301" y="4434929"/>
+            <a:ext cx="8498026" cy="213271"/>
+          </a:xfrm>
+          <a:prstGeom prst="rect">
+            <a:avLst/>
+          </a:prstGeom>
+          <a:noFill/>
+          <a:ln/>
+        </p:spPr>
+        <p:txBody>
+          <a:bodyPr wrap="square" lIns="0" tIns="0" rIns="0" bIns="0" rtlCol="0" anchor="t"/>
+          <a:lstStyle/>
+          <a:p>
+            <a:pPr algn="l" indent="0" marL="0">
+              <a:lnSpc>
+                <a:spcPts val="1680"/>
+              </a:lnSpc>
+              <a:spcBef>
+                <a:spcPts val="300"/>
+              </a:spcBef>
+              <a:spcAft>
+                <a:spcPts val="300"/>
+              </a:spcAft>
+              <a:buNone/>
+            </a:pPr>
+            <a:r>
+              <a:rPr lang="en-US" sz="1200" dirty="0">
+                <a:solidFill>
+                  <a:srgbClr val="1C2833"/>
+                </a:solidFill>
+                <a:latin typeface="Arial" pitchFamily="34" charset="0"/>
+                <a:ea typeface="Arial" pitchFamily="34" charset="-122"/>
+                <a:cs typeface="Arial" pitchFamily="34" charset="-120"/>
+              </a:rPr>
+              <a:t>Middle ·  · IKS Curriculum</a:t>
+            </a:r>
+            <a:endParaRPr lang="en-US" sz="1200" dirty="0"/>
+          </a:p>
+        </p:txBody>
+      </p:sp>
+    </p:spTree>
+  </p:cSld>
+  <p:clrMapOvr>
+    <a:masterClrMapping/>
+  </p:clrMapOvr>
+</p:sld>
+</file>
+
+<file path=ppt/slides/slide16.xml><?xml version="1.0" encoding="utf-8"?>
+<p:sld xmlns:a="http://schemas.openxmlformats.org/drawingml/2006/main" xmlns:r="http://schemas.openxmlformats.org/officeDocument/2006/relationships" xmlns:p="http://schemas.openxmlformats.org/presentationml/2006/main">
+  <p:cSld name="Slide 16">
+    <p:bg>
+      <p:bgPr>
+        <a:solidFill>
+          <a:srgbClr val="FFFFFF"/>
+        </a:solidFill>
+      </p:bgPr>
+    </p:bg>
+    <p:spTree>
+      <p:nvGrpSpPr>
+        <p:cNvPr id="1" name=""/>
+        <p:cNvGrpSpPr/>
+        <p:nvPr/>
+      </p:nvGrpSpPr>
+      <p:grpSpPr>
+        <a:xfrm>
+          <a:off x="0" y="0"/>
+          <a:ext cx="0" cy="0"/>
+          <a:chOff x="0" y="0"/>
+          <a:chExt cx="0" cy="0"/>
+        </a:xfrm>
+      </p:grpSpPr>
+      <p:sp>
+        <p:nvSpPr>
+          <p:cNvPr id="2" name="Text 0"/>
+          <p:cNvSpPr/>
+          <p:nvPr/>
+        </p:nvSpPr>
+        <p:spPr>
+          <a:xfrm>
+            <a:off x="0" y="0"/>
+            <a:ext cx="9144000" cy="101501"/>
+          </a:xfrm>
+          <a:prstGeom prst="rect">
+            <a:avLst/>
+          </a:prstGeom>
+          <a:solidFill>
+            <a:srgbClr val="277884"/>
+          </a:solidFill>
+          <a:ln/>
+        </p:spPr>
+        <p:txBody>
+          <a:bodyPr wrap="square" rtlCol="0" anchor="ctr"/>
+          <a:lstStyle/>
+          <a:p>
+            <a:pPr indent="0" marL="0">
+              <a:buNone/>
+            </a:pPr>
+            <a:endParaRPr lang="en-US" dirty="0"/>
+          </a:p>
+        </p:txBody>
+      </p:sp>
+      <p:sp>
+        <p:nvSpPr>
+          <p:cNvPr id="3" name="Text 1"/>
+          <p:cNvSpPr/>
+          <p:nvPr/>
+        </p:nvSpPr>
+        <p:spPr>
+          <a:xfrm>
+            <a:off x="406301" y="457051"/>
+            <a:ext cx="8498026" cy="274290"/>
+          </a:xfrm>
+          <a:prstGeom prst="rect">
+            <a:avLst/>
+          </a:prstGeom>
+          <a:noFill/>
+          <a:ln/>
+        </p:spPr>
+        <p:txBody>
+          <a:bodyPr wrap="square" lIns="0" tIns="0" rIns="0" bIns="0" rtlCol="0" anchor="t"/>
+          <a:lstStyle/>
+          <a:p>
+            <a:pPr algn="l" indent="0" marL="0">
+              <a:lnSpc>
+                <a:spcPts val="2160"/>
+              </a:lnSpc>
+              <a:spcBef>
+                <a:spcPts val="600"/>
+              </a:spcBef>
+              <a:spcAft>
+                <a:spcPts val="800"/>
+              </a:spcAft>
+              <a:buNone/>
+            </a:pPr>
+            <a:r>
+              <a:rPr lang="en-US" sz="1800" b="1" dirty="0">
+                <a:solidFill>
+                  <a:srgbClr val="FE4447"/>
+                </a:solidFill>
+                <a:latin typeface="Georgia" pitchFamily="34" charset="0"/>
+                <a:ea typeface="Georgia" pitchFamily="34" charset="-122"/>
+                <a:cs typeface="Georgia" pitchFamily="34" charset="-120"/>
+              </a:rPr>
               <a:t>Citation(s) used</a:t>
             </a:r>
             <a:endParaRPr lang="en-US" sz="1800" dirty="0"/>
@@ -2828,8 +4238,8 @@
         </p:nvSpPr>
         <p:spPr>
           <a:xfrm>
-            <a:off x="406301" y="870942"/>
-            <a:ext cx="8498026" cy="213271"/>
+            <a:off x="634901" y="883593"/>
+            <a:ext cx="8102798" cy="487561"/>
           </a:xfrm>
           <a:prstGeom prst="rect">
             <a:avLst/>
@@ -2841,17 +4251,15 @@
           <a:bodyPr wrap="square" lIns="0" tIns="0" rIns="0" bIns="0" rtlCol="0" anchor="t"/>
           <a:lstStyle/>
           <a:p>
-            <a:pPr algn="l" indent="0" marL="0">
-              <a:lnSpc>
-                <a:spcPts val="1680"/>
-              </a:lnSpc>
-              <a:spcBef>
-                <a:spcPts val="300"/>
-              </a:spcBef>
-              <a:spcAft>
-                <a:spcPts val="300"/>
-              </a:spcAft>
-              <a:buNone/>
+            <a:pPr algn="l" marL="342900" indent="-342900">
+              <a:lnSpc>
+                <a:spcPts val="1620"/>
+              </a:lnSpc>
+              <a:spcAft>
+                <a:spcPts val="300"/>
+              </a:spcAft>
+              <a:buSzPct val="100000"/>
+              <a:buChar char="•"/>
             </a:pPr>
             <a:r>
               <a:rPr lang="en-US" sz="1200" dirty="0">
@@ -2862,7 +4270,7 @@
                 <a:ea typeface="Arial" pitchFamily="34" charset="-122"/>
                 <a:cs typeface="Arial" pitchFamily="34" charset="-120"/>
               </a:rPr>
-              <a:t>– Self-assessment adapted from standard Ayurveda introductory texts (Wujastyk 2003; various modern Ayurveda primers).</a:t>
+              <a:t>Self-assessment adapted from standard Ayurveda introductory texts (Wujastyk 2003; various modern Ayurveda primers).</a:t>
             </a:r>
             <a:endParaRPr lang="en-US" sz="1200" dirty="0"/>
           </a:p>
@@ -3020,7 +4428,7 @@
                 <a:ea typeface="Georgia" pitchFamily="34" charset="-122"/>
                 <a:cs typeface="Georgia" pitchFamily="34" charset="-120"/>
               </a:rPr>
-              <a:t>Materials</a:t>
+              <a:t>Learning objective</a:t>
             </a:r>
             <a:endParaRPr lang="en-US" sz="1800" dirty="0"/>
           </a:p>
@@ -3035,7 +4443,7 @@
         <p:spPr>
           <a:xfrm>
             <a:off x="406301" y="870942"/>
-            <a:ext cx="8498026" cy="213271"/>
+            <a:ext cx="8498026" cy="426541"/>
           </a:xfrm>
           <a:prstGeom prst="rect">
             <a:avLst/>
@@ -3068,7 +4476,7 @@
                 <a:ea typeface="Arial" pitchFamily="34" charset="-122"/>
                 <a:cs typeface="Arial" pitchFamily="34" charset="-120"/>
               </a:rPr>
-              <a:t>– Self-assessment worksheet (12 questions)</a:t>
+              <a:t>Students apply the dosha framework to themselves via a self-assessment worksheet, while understanding firmly that it is for fun and learning, not medical diagnosis.</a:t>
             </a:r>
             <a:endParaRPr lang="en-US" sz="1200" dirty="0"/>
           </a:p>
@@ -3226,7 +4634,7 @@
                 <a:ea typeface="Georgia" pitchFamily="34" charset="-122"/>
                 <a:cs typeface="Georgia" pitchFamily="34" charset="-120"/>
               </a:rPr>
-              <a:t>Flow</a:t>
+              <a:t>Materials</a:t>
             </a:r>
             <a:endParaRPr lang="en-US" sz="1800" dirty="0"/>
           </a:p>
@@ -3235,6 +4643,52 @@
       <p:sp>
         <p:nvSpPr>
           <p:cNvPr id="4" name="Text 2"/>
+          <p:cNvSpPr/>
+          <p:nvPr/>
+        </p:nvSpPr>
+        <p:spPr>
+          <a:xfrm>
+            <a:off x="634901" y="883593"/>
+            <a:ext cx="8102798" cy="281880"/>
+          </a:xfrm>
+          <a:prstGeom prst="rect">
+            <a:avLst/>
+          </a:prstGeom>
+          <a:noFill/>
+          <a:ln/>
+        </p:spPr>
+        <p:txBody>
+          <a:bodyPr wrap="square" lIns="0" tIns="0" rIns="0" bIns="0" rtlCol="0" anchor="t"/>
+          <a:lstStyle/>
+          <a:p>
+            <a:pPr algn="l" marL="342900" indent="-342900">
+              <a:lnSpc>
+                <a:spcPts val="1620"/>
+              </a:lnSpc>
+              <a:spcAft>
+                <a:spcPts val="300"/>
+              </a:spcAft>
+              <a:buSzPct val="100000"/>
+              <a:buChar char="•"/>
+            </a:pPr>
+            <a:r>
+              <a:rPr lang="en-US" sz="1200" dirty="0">
+                <a:solidFill>
+                  <a:srgbClr val="1C2833"/>
+                </a:solidFill>
+                <a:latin typeface="Arial" pitchFamily="34" charset="0"/>
+                <a:ea typeface="Arial" pitchFamily="34" charset="-122"/>
+                <a:cs typeface="Arial" pitchFamily="34" charset="-120"/>
+              </a:rPr>
+              <a:t>Self-assessment worksheet (12 questions)</a:t>
+            </a:r>
+            <a:endParaRPr lang="en-US" sz="1200" dirty="0"/>
+          </a:p>
+        </p:txBody>
+      </p:sp>
+      <p:sp>
+        <p:nvSpPr>
+          <p:cNvPr id="5" name="Text 3"/>
           <p:cNvSpPr/>
           <p:nvPr/>
         </p:nvSpPr>
@@ -3384,7 +4838,7 @@
                 <a:ea typeface="Georgia" pitchFamily="34" charset="-122"/>
                 <a:cs typeface="Georgia" pitchFamily="34" charset="-120"/>
               </a:rPr>
-              <a:t>Warm-up (5 min)</a:t>
+              <a:t>Flow</a:t>
             </a:r>
             <a:endParaRPr lang="en-US" sz="1800" dirty="0"/>
           </a:p>
@@ -3393,54 +4847,6 @@
       <p:sp>
         <p:nvSpPr>
           <p:cNvPr id="4" name="Text 2"/>
-          <p:cNvSpPr/>
-          <p:nvPr/>
-        </p:nvSpPr>
-        <p:spPr>
-          <a:xfrm>
-            <a:off x="406301" y="870942"/>
-            <a:ext cx="8498026" cy="213271"/>
-          </a:xfrm>
-          <a:prstGeom prst="rect">
-            <a:avLst/>
-          </a:prstGeom>
-          <a:noFill/>
-          <a:ln/>
-        </p:spPr>
-        <p:txBody>
-          <a:bodyPr wrap="square" lIns="0" tIns="0" rIns="0" bIns="0" rtlCol="0" anchor="t"/>
-          <a:lstStyle/>
-          <a:p>
-            <a:pPr algn="l" indent="0" marL="0">
-              <a:lnSpc>
-                <a:spcPts val="1680"/>
-              </a:lnSpc>
-              <a:spcBef>
-                <a:spcPts val="300"/>
-              </a:spcBef>
-              <a:spcAft>
-                <a:spcPts val="300"/>
-              </a:spcAft>
-              <a:buNone/>
-            </a:pPr>
-            <a:r>
-              <a:rPr lang="en-US" sz="1200" dirty="0">
-                <a:solidFill>
-                  <a:srgbClr val="1C2833"/>
-                </a:solidFill>
-                <a:latin typeface="Arial" pitchFamily="34" charset="0"/>
-                <a:ea typeface="Arial" pitchFamily="34" charset="-122"/>
-                <a:cs typeface="Arial" pitchFamily="34" charset="-120"/>
-              </a:rPr>
-              <a:t>Daily prompt + recall: 3 doshas with one quality each.</a:t>
-            </a:r>
-            <a:endParaRPr lang="en-US" sz="1200" dirty="0"/>
-          </a:p>
-        </p:txBody>
-      </p:sp>
-      <p:sp>
-        <p:nvSpPr>
-          <p:cNvPr id="5" name="Text 3"/>
           <p:cNvSpPr/>
           <p:nvPr/>
         </p:nvSpPr>
@@ -3590,7 +4996,7 @@
                 <a:ea typeface="Georgia" pitchFamily="34" charset="-122"/>
                 <a:cs typeface="Georgia" pitchFamily="34" charset="-120"/>
               </a:rPr>
-              <a:t>The disclaimer (5 min) — TEACHER FRAMING IS CRITICAL</a:t>
+              <a:t>Warm-up (5 min)</a:t>
             </a:r>
             <a:endParaRPr lang="en-US" sz="1800" dirty="0"/>
           </a:p>
@@ -3638,7 +5044,7 @@
                 <a:ea typeface="Arial" pitchFamily="34" charset="-122"/>
                 <a:cs typeface="Arial" pitchFamily="34" charset="-120"/>
               </a:rPr>
-              <a:t>Write on board:</a:t>
+              <a:t>Daily prompt + recall: 3 doshas with one quality each.</a:t>
             </a:r>
             <a:endParaRPr lang="en-US" sz="1200" dirty="0"/>
           </a:p>
@@ -3647,299 +5053,6 @@
       <p:sp>
         <p:nvSpPr>
           <p:cNvPr id="5" name="Text 3"/>
-          <p:cNvSpPr/>
-          <p:nvPr/>
-        </p:nvSpPr>
-        <p:spPr>
-          <a:xfrm>
-            <a:off x="406301" y="1173063"/>
-            <a:ext cx="8331398" cy="1419225"/>
-          </a:xfrm>
-          <a:prstGeom prst="rect">
-            <a:avLst/>
-          </a:prstGeom>
-          <a:solidFill>
-            <a:srgbClr val="F4F8F9"/>
-          </a:solidFill>
-          <a:ln/>
-        </p:spPr>
-        <p:txBody>
-          <a:bodyPr wrap="square" rtlCol="0" anchor="ctr"/>
-          <a:lstStyle/>
-          <a:p>
-            <a:pPr indent="0" marL="0">
-              <a:buNone/>
-            </a:pPr>
-            <a:endParaRPr lang="en-US" dirty="0"/>
-          </a:p>
-        </p:txBody>
-      </p:sp>
-      <p:sp>
-        <p:nvSpPr>
-          <p:cNvPr id="6" name="Shape 4"/>
-          <p:cNvSpPr/>
-          <p:nvPr/>
-        </p:nvSpPr>
-        <p:spPr>
-          <a:xfrm>
-            <a:off x="434876" y="1173063"/>
-            <a:ext cx="0" cy="1419225"/>
-          </a:xfrm>
-          <a:prstGeom prst="line">
-            <a:avLst/>
-          </a:prstGeom>
-          <a:noFill/>
-          <a:ln w="57150">
-            <a:solidFill>
-              <a:srgbClr val="FE4447"/>
-            </a:solidFill>
-            <a:prstDash val="solid"/>
-          </a:ln>
-        </p:spPr>
-      </p:sp>
-      <p:sp>
-        <p:nvSpPr>
-          <p:cNvPr id="7" name="Text 5"/>
-          <p:cNvSpPr/>
-          <p:nvPr/>
-        </p:nvSpPr>
-        <p:spPr>
-          <a:xfrm>
-            <a:off x="692051" y="1363563"/>
-            <a:ext cx="7973389" cy="230981"/>
-          </a:xfrm>
-          <a:prstGeom prst="rect">
-            <a:avLst/>
-          </a:prstGeom>
-          <a:noFill/>
-          <a:ln/>
-        </p:spPr>
-        <p:txBody>
-          <a:bodyPr wrap="square" lIns="0" tIns="0" rIns="0" bIns="0" rtlCol="0" anchor="t"/>
-          <a:lstStyle/>
-          <a:p>
-            <a:pPr algn="l" indent="0" marL="0">
-              <a:lnSpc>
-                <a:spcPts val="1820"/>
-              </a:lnSpc>
-              <a:spcBef>
-                <a:spcPts val="300"/>
-              </a:spcBef>
-              <a:spcAft>
-                <a:spcPts val="300"/>
-              </a:spcAft>
-              <a:buNone/>
-            </a:pPr>
-            <a:r>
-              <a:rPr lang="en-US" sz="1300" b="1" i="1" dirty="0">
-                <a:solidFill>
-                  <a:srgbClr val="1C2833"/>
-                </a:solidFill>
-                <a:latin typeface="Georgia" pitchFamily="34" charset="0"/>
-                <a:ea typeface="Georgia" pitchFamily="34" charset="-122"/>
-                <a:cs typeface="Georgia" pitchFamily="34" charset="-120"/>
-              </a:rPr>
-              <a:t>TODAY'S QUIZ IS NOT A DIAGNOSIS.</a:t>
-            </a:r>
-            <a:endParaRPr lang="en-US" sz="1300" dirty="0"/>
-          </a:p>
-        </p:txBody>
-      </p:sp>
-      <p:sp>
-        <p:nvSpPr>
-          <p:cNvPr id="8" name="Text 6"/>
-          <p:cNvSpPr/>
-          <p:nvPr/>
-        </p:nvSpPr>
-        <p:spPr>
-          <a:xfrm>
-            <a:off x="692051" y="1632645"/>
-            <a:ext cx="7973389" cy="230981"/>
-          </a:xfrm>
-          <a:prstGeom prst="rect">
-            <a:avLst/>
-          </a:prstGeom>
-          <a:noFill/>
-          <a:ln/>
-        </p:spPr>
-        <p:txBody>
-          <a:bodyPr wrap="square" lIns="0" tIns="0" rIns="0" bIns="0" rtlCol="0" anchor="t"/>
-          <a:lstStyle/>
-          <a:p>
-            <a:pPr algn="l" indent="0" marL="0">
-              <a:lnSpc>
-                <a:spcPts val="1820"/>
-              </a:lnSpc>
-              <a:spcBef>
-                <a:spcPts val="300"/>
-              </a:spcBef>
-              <a:spcAft>
-                <a:spcPts val="300"/>
-              </a:spcAft>
-              <a:buNone/>
-            </a:pPr>
-            <a:r>
-              <a:rPr lang="en-US" sz="1300" i="1" dirty="0">
-                <a:solidFill>
-                  <a:srgbClr val="1C2833"/>
-                </a:solidFill>
-                <a:latin typeface="Georgia" pitchFamily="34" charset="0"/>
-                <a:ea typeface="Georgia" pitchFamily="34" charset="-122"/>
-                <a:cs typeface="Georgia" pitchFamily="34" charset="-120"/>
-              </a:rPr>
-              <a:t>It's a way to practise the framework.</a:t>
-            </a:r>
-            <a:endParaRPr lang="en-US" sz="1300" dirty="0"/>
-          </a:p>
-        </p:txBody>
-      </p:sp>
-      <p:sp>
-        <p:nvSpPr>
-          <p:cNvPr id="9" name="Text 7"/>
-          <p:cNvSpPr/>
-          <p:nvPr/>
-        </p:nvSpPr>
-        <p:spPr>
-          <a:xfrm>
-            <a:off x="692051" y="1901726"/>
-            <a:ext cx="7973389" cy="230981"/>
-          </a:xfrm>
-          <a:prstGeom prst="rect">
-            <a:avLst/>
-          </a:prstGeom>
-          <a:noFill/>
-          <a:ln/>
-        </p:spPr>
-        <p:txBody>
-          <a:bodyPr wrap="square" lIns="0" tIns="0" rIns="0" bIns="0" rtlCol="0" anchor="t"/>
-          <a:lstStyle/>
-          <a:p>
-            <a:pPr algn="l" indent="0" marL="0">
-              <a:lnSpc>
-                <a:spcPts val="1820"/>
-              </a:lnSpc>
-              <a:spcBef>
-                <a:spcPts val="300"/>
-              </a:spcBef>
-              <a:spcAft>
-                <a:spcPts val="300"/>
-              </a:spcAft>
-              <a:buNone/>
-            </a:pPr>
-            <a:r>
-              <a:rPr lang="en-US" sz="1300" i="1" dirty="0">
-                <a:solidFill>
-                  <a:srgbClr val="1C2833"/>
-                </a:solidFill>
-                <a:latin typeface="Georgia" pitchFamily="34" charset="0"/>
-                <a:ea typeface="Georgia" pitchFamily="34" charset="-122"/>
-                <a:cs typeface="Georgia" pitchFamily="34" charset="-120"/>
-              </a:rPr>
-              <a:t>If you have any health concerns, see a doctor.</a:t>
-            </a:r>
-            <a:endParaRPr lang="en-US" sz="1300" dirty="0"/>
-          </a:p>
-        </p:txBody>
-      </p:sp>
-      <p:sp>
-        <p:nvSpPr>
-          <p:cNvPr id="10" name="Text 8"/>
-          <p:cNvSpPr/>
-          <p:nvPr/>
-        </p:nvSpPr>
-        <p:spPr>
-          <a:xfrm>
-            <a:off x="692051" y="2170807"/>
-            <a:ext cx="7973389" cy="230981"/>
-          </a:xfrm>
-          <a:prstGeom prst="rect">
-            <a:avLst/>
-          </a:prstGeom>
-          <a:noFill/>
-          <a:ln/>
-        </p:spPr>
-        <p:txBody>
-          <a:bodyPr wrap="square" lIns="0" tIns="0" rIns="0" bIns="0" rtlCol="0" anchor="t"/>
-          <a:lstStyle/>
-          <a:p>
-            <a:pPr algn="l" indent="0" marL="0">
-              <a:lnSpc>
-                <a:spcPts val="1820"/>
-              </a:lnSpc>
-              <a:spcBef>
-                <a:spcPts val="300"/>
-              </a:spcBef>
-              <a:spcAft>
-                <a:spcPts val="300"/>
-              </a:spcAft>
-              <a:buNone/>
-            </a:pPr>
-            <a:r>
-              <a:rPr lang="en-US" sz="1300" i="1" dirty="0">
-                <a:solidFill>
-                  <a:srgbClr val="1C2833"/>
-                </a:solidFill>
-                <a:latin typeface="Georgia" pitchFamily="34" charset="0"/>
-                <a:ea typeface="Georgia" pitchFamily="34" charset="-122"/>
-                <a:cs typeface="Georgia" pitchFamily="34" charset="-120"/>
-              </a:rPr>
-              <a:t>Everyone has all three doshas.</a:t>
-            </a:r>
-            <a:endParaRPr lang="en-US" sz="1300" dirty="0"/>
-          </a:p>
-        </p:txBody>
-      </p:sp>
-      <p:sp>
-        <p:nvSpPr>
-          <p:cNvPr id="11" name="Text 9"/>
-          <p:cNvSpPr/>
-          <p:nvPr/>
-        </p:nvSpPr>
-        <p:spPr>
-          <a:xfrm>
-            <a:off x="406301" y="2681139"/>
-            <a:ext cx="8498026" cy="213271"/>
-          </a:xfrm>
-          <a:prstGeom prst="rect">
-            <a:avLst/>
-          </a:prstGeom>
-          <a:noFill/>
-          <a:ln/>
-        </p:spPr>
-        <p:txBody>
-          <a:bodyPr wrap="square" lIns="0" tIns="0" rIns="0" bIns="0" rtlCol="0" anchor="t"/>
-          <a:lstStyle/>
-          <a:p>
-            <a:pPr algn="l" indent="0" marL="0">
-              <a:lnSpc>
-                <a:spcPts val="1680"/>
-              </a:lnSpc>
-              <a:spcBef>
-                <a:spcPts val="300"/>
-              </a:spcBef>
-              <a:spcAft>
-                <a:spcPts val="300"/>
-              </a:spcAft>
-              <a:buNone/>
-            </a:pPr>
-            <a:r>
-              <a:rPr lang="en-US" sz="1200" dirty="0">
-                <a:solidFill>
-                  <a:srgbClr val="1C2833"/>
-                </a:solidFill>
-                <a:latin typeface="Arial" pitchFamily="34" charset="0"/>
-                <a:ea typeface="Arial" pitchFamily="34" charset="-122"/>
-                <a:cs typeface="Arial" pitchFamily="34" charset="-120"/>
-              </a:rPr>
-              <a:t>Make the class chorus this last line out loud.</a:t>
-            </a:r>
-            <a:endParaRPr lang="en-US" sz="1200" dirty="0"/>
-          </a:p>
-        </p:txBody>
-      </p:sp>
-      <p:sp>
-        <p:nvSpPr>
-          <p:cNvPr id="12" name="Text 10"/>
           <p:cNvSpPr/>
           <p:nvPr/>
         </p:nvSpPr>
@@ -4089,7 +5202,7 @@
                 <a:ea typeface="Georgia" pitchFamily="34" charset="-122"/>
                 <a:cs typeface="Georgia" pitchFamily="34" charset="-120"/>
               </a:rPr>
-              <a:t>Self-assessment (15 min)</a:t>
+              <a:t>The disclaimer (5 min) — TEACHER FRAMING IS CRITICAL</a:t>
             </a:r>
             <a:endParaRPr lang="en-US" sz="1800" dirty="0"/>
           </a:p>
@@ -4137,7 +5250,7 @@
                 <a:ea typeface="Arial" pitchFamily="34" charset="-122"/>
                 <a:cs typeface="Arial" pitchFamily="34" charset="-120"/>
               </a:rPr>
-              <a:t>Hand out worksheet (sample below). Students answer honestly. Tally V / P / K.</a:t>
+              <a:t>Write on board:</a:t>
             </a:r>
             <a:endParaRPr lang="en-US" sz="1200" dirty="0"/>
           </a:p>
@@ -4151,13 +5264,66 @@
         </p:nvSpPr>
         <p:spPr>
           <a:xfrm>
-            <a:off x="406301" y="1198513"/>
-            <a:ext cx="8498026" cy="209550"/>
-          </a:xfrm>
-          <a:prstGeom prst="rect">
+            <a:off x="406301" y="1173063"/>
+            <a:ext cx="8331398" cy="1419225"/>
+          </a:xfrm>
+          <a:prstGeom prst="rect">
+            <a:avLst/>
+          </a:prstGeom>
+          <a:solidFill>
+            <a:srgbClr val="F4F8F9"/>
+          </a:solidFill>
+          <a:ln/>
+        </p:spPr>
+        <p:txBody>
+          <a:bodyPr wrap="square" rtlCol="0" anchor="ctr"/>
+          <a:lstStyle/>
+          <a:p>
+            <a:pPr indent="0" marL="0">
+              <a:buNone/>
+            </a:pPr>
+            <a:endParaRPr lang="en-US" dirty="0"/>
+          </a:p>
+        </p:txBody>
+      </p:sp>
+      <p:sp>
+        <p:nvSpPr>
+          <p:cNvPr id="6" name="Shape 4"/>
+          <p:cNvSpPr/>
+          <p:nvPr/>
+        </p:nvSpPr>
+        <p:spPr>
+          <a:xfrm>
+            <a:off x="434876" y="1173063"/>
+            <a:ext cx="0" cy="1419225"/>
+          </a:xfrm>
+          <a:prstGeom prst="line">
             <a:avLst/>
           </a:prstGeom>
           <a:noFill/>
+          <a:ln w="57150">
+            <a:solidFill>
+              <a:srgbClr val="FE4447"/>
+            </a:solidFill>
+            <a:prstDash val="solid"/>
+          </a:ln>
+        </p:spPr>
+      </p:sp>
+      <p:sp>
+        <p:nvSpPr>
+          <p:cNvPr id="7" name="Text 5"/>
+          <p:cNvSpPr/>
+          <p:nvPr/>
+        </p:nvSpPr>
+        <p:spPr>
+          <a:xfrm>
+            <a:off x="692051" y="1363563"/>
+            <a:ext cx="7973389" cy="230981"/>
+          </a:xfrm>
+          <a:prstGeom prst="rect">
+            <a:avLst/>
+          </a:prstGeom>
+          <a:noFill/>
           <a:ln/>
         </p:spPr>
         <p:txBody>
@@ -4165,39 +5331,42 @@
           <a:lstStyle/>
           <a:p>
             <a:pPr algn="l" indent="0" marL="0">
+              <a:lnSpc>
+                <a:spcPts val="1820"/>
+              </a:lnSpc>
               <a:spcBef>
-                <a:spcPts val="600"/>
+                <a:spcPts val="300"/>
               </a:spcBef>
               <a:spcAft>
-                <a:spcPts val="400"/>
-              </a:spcAft>
-              <a:buNone/>
-            </a:pPr>
-            <a:r>
-              <a:rPr lang="en-US" sz="1400" b="1" dirty="0">
-                <a:solidFill>
-                  <a:srgbClr val="1C2833"/>
-                </a:solidFill>
-                <a:latin typeface="Arial" pitchFamily="34" charset="0"/>
-                <a:ea typeface="Arial" pitchFamily="34" charset="-122"/>
-                <a:cs typeface="Arial" pitchFamily="34" charset="-120"/>
-              </a:rPr>
-              <a:t>Worksheet (12 questions, 3 each per dosha)</a:t>
-            </a:r>
-            <a:endParaRPr lang="en-US" sz="1400" dirty="0"/>
-          </a:p>
-        </p:txBody>
-      </p:sp>
-      <p:sp>
-        <p:nvSpPr>
-          <p:cNvPr id="6" name="Text 4"/>
-          <p:cNvSpPr/>
-          <p:nvPr/>
-        </p:nvSpPr>
-        <p:spPr>
-          <a:xfrm>
-            <a:off x="406301" y="1496913"/>
-            <a:ext cx="8498026" cy="213271"/>
+                <a:spcPts val="300"/>
+              </a:spcAft>
+              <a:buNone/>
+            </a:pPr>
+            <a:r>
+              <a:rPr lang="en-US" sz="1300" b="1" i="1" dirty="0">
+                <a:solidFill>
+                  <a:srgbClr val="1C2833"/>
+                </a:solidFill>
+                <a:latin typeface="Georgia" pitchFamily="34" charset="0"/>
+                <a:ea typeface="Georgia" pitchFamily="34" charset="-122"/>
+                <a:cs typeface="Georgia" pitchFamily="34" charset="-120"/>
+              </a:rPr>
+              <a:t>TODAY'S QUIZ IS NOT A DIAGNOSIS.</a:t>
+            </a:r>
+            <a:endParaRPr lang="en-US" sz="1300" dirty="0"/>
+          </a:p>
+        </p:txBody>
+      </p:sp>
+      <p:sp>
+        <p:nvSpPr>
+          <p:cNvPr id="8" name="Text 6"/>
+          <p:cNvSpPr/>
+          <p:nvPr/>
+        </p:nvSpPr>
+        <p:spPr>
+          <a:xfrm>
+            <a:off x="692051" y="1632645"/>
+            <a:ext cx="7973389" cy="230981"/>
           </a:xfrm>
           <a:prstGeom prst="rect">
             <a:avLst/>
@@ -4211,7 +5380,7 @@
           <a:p>
             <a:pPr algn="l" indent="0" marL="0">
               <a:lnSpc>
-                <a:spcPts val="1680"/>
+                <a:spcPts val="1820"/>
               </a:lnSpc>
               <a:spcBef>
                 <a:spcPts val="300"/>
@@ -4222,30 +5391,30 @@
               <a:buNone/>
             </a:pPr>
             <a:r>
-              <a:rPr lang="en-US" sz="1200" dirty="0">
-                <a:solidFill>
-                  <a:srgbClr val="1C2833"/>
-                </a:solidFill>
-                <a:latin typeface="Arial" pitchFamily="34" charset="0"/>
-                <a:ea typeface="Arial" pitchFamily="34" charset="-122"/>
-                <a:cs typeface="Arial" pitchFamily="34" charset="-120"/>
-              </a:rPr>
-              <a:t>For each, circle the option closest to you:</a:t>
-            </a:r>
-            <a:endParaRPr lang="en-US" sz="1200" dirty="0"/>
-          </a:p>
-        </p:txBody>
-      </p:sp>
-      <p:sp>
-        <p:nvSpPr>
-          <p:cNvPr id="7" name="Text 5"/>
-          <p:cNvSpPr/>
-          <p:nvPr/>
-        </p:nvSpPr>
-        <p:spPr>
-          <a:xfrm>
-            <a:off x="406301" y="1786384"/>
-            <a:ext cx="8498026" cy="213271"/>
+              <a:rPr lang="en-US" sz="1300" i="1" dirty="0">
+                <a:solidFill>
+                  <a:srgbClr val="1C2833"/>
+                </a:solidFill>
+                <a:latin typeface="Georgia" pitchFamily="34" charset="0"/>
+                <a:ea typeface="Georgia" pitchFamily="34" charset="-122"/>
+                <a:cs typeface="Georgia" pitchFamily="34" charset="-120"/>
+              </a:rPr>
+              <a:t>It's a way to practise the framework.</a:t>
+            </a:r>
+            <a:endParaRPr lang="en-US" sz="1300" dirty="0"/>
+          </a:p>
+        </p:txBody>
+      </p:sp>
+      <p:sp>
+        <p:nvSpPr>
+          <p:cNvPr id="9" name="Text 7"/>
+          <p:cNvSpPr/>
+          <p:nvPr/>
+        </p:nvSpPr>
+        <p:spPr>
+          <a:xfrm>
+            <a:off x="692051" y="1901726"/>
+            <a:ext cx="7973389" cy="230981"/>
           </a:xfrm>
           <a:prstGeom prst="rect">
             <a:avLst/>
@@ -4259,7 +5428,7 @@
           <a:p>
             <a:pPr algn="l" indent="0" marL="0">
               <a:lnSpc>
-                <a:spcPts val="1680"/>
+                <a:spcPts val="1820"/>
               </a:lnSpc>
               <a:spcBef>
                 <a:spcPts val="300"/>
@@ -4270,30 +5439,30 @@
               <a:buNone/>
             </a:pPr>
             <a:r>
-              <a:rPr lang="en-US" sz="1200" i="1" dirty="0">
-                <a:solidFill>
-                  <a:srgbClr val="1C2833"/>
-                </a:solidFill>
-                <a:latin typeface="Arial" pitchFamily="34" charset="0"/>
-                <a:ea typeface="Arial" pitchFamily="34" charset="-122"/>
-                <a:cs typeface="Arial" pitchFamily="34" charset="-120"/>
-              </a:rPr>
-              <a:t>Each row: # · Question · V · P · K.</a:t>
-            </a:r>
-            <a:endParaRPr lang="en-US" sz="1200" dirty="0"/>
-          </a:p>
-        </p:txBody>
-      </p:sp>
-      <p:sp>
-        <p:nvSpPr>
-          <p:cNvPr id="8" name="Text 6"/>
-          <p:cNvSpPr/>
-          <p:nvPr/>
-        </p:nvSpPr>
-        <p:spPr>
-          <a:xfrm>
-            <a:off x="634901" y="2088505"/>
-            <a:ext cx="8102798" cy="2963466"/>
+              <a:rPr lang="en-US" sz="1300" i="1" dirty="0">
+                <a:solidFill>
+                  <a:srgbClr val="1C2833"/>
+                </a:solidFill>
+                <a:latin typeface="Georgia" pitchFamily="34" charset="0"/>
+                <a:ea typeface="Georgia" pitchFamily="34" charset="-122"/>
+                <a:cs typeface="Georgia" pitchFamily="34" charset="-120"/>
+              </a:rPr>
+              <a:t>If you have any health concerns, see a doctor.</a:t>
+            </a:r>
+            <a:endParaRPr lang="en-US" sz="1300" dirty="0"/>
+          </a:p>
+        </p:txBody>
+      </p:sp>
+      <p:sp>
+        <p:nvSpPr>
+          <p:cNvPr id="10" name="Text 8"/>
+          <p:cNvSpPr/>
+          <p:nvPr/>
+        </p:nvSpPr>
+        <p:spPr>
+          <a:xfrm>
+            <a:off x="692051" y="2170807"/>
+            <a:ext cx="7973389" cy="230981"/>
           </a:xfrm>
           <a:prstGeom prst="rect">
             <a:avLst/>
@@ -4305,559 +5474,9 @@
           <a:bodyPr wrap="square" lIns="0" tIns="0" rIns="0" bIns="0" rtlCol="0" anchor="t"/>
           <a:lstStyle/>
           <a:p>
-            <a:pPr algn="l" marL="342900" indent="-342900">
-              <a:lnSpc>
-                <a:spcPts val="1620"/>
-              </a:lnSpc>
-              <a:spcAft>
-                <a:spcPts val="300"/>
-              </a:spcAft>
-              <a:buSzPct val="100000"/>
-              <a:buChar char="•"/>
-            </a:pPr>
-            <a:r>
-              <a:rPr lang="en-US" sz="1200" b="1" dirty="0">
-                <a:solidFill>
-                  <a:srgbClr val="1C2833"/>
-                </a:solidFill>
-                <a:latin typeface="Arial" pitchFamily="34" charset="0"/>
-                <a:ea typeface="Arial" pitchFamily="34" charset="-122"/>
-                <a:cs typeface="Arial" pitchFamily="34" charset="-120"/>
-              </a:rPr>
-              <a:t>1</a:t>
-            </a:r>
             <a:pPr algn="l" indent="0" marL="0">
               <a:lnSpc>
-                <a:spcPts val="1620"/>
-              </a:lnSpc>
-              <a:spcAft>
-                <a:spcPts val="300"/>
-              </a:spcAft>
-              <a:buNone/>
-            </a:pPr>
-            <a:r>
-              <a:rPr lang="en-US" sz="1200" dirty="0">
-                <a:solidFill>
-                  <a:srgbClr val="1C2833"/>
-                </a:solidFill>
-                <a:latin typeface="Arial" pitchFamily="34" charset="0"/>
-                <a:ea typeface="Arial" pitchFamily="34" charset="-122"/>
-                <a:cs typeface="Arial" pitchFamily="34" charset="-120"/>
-              </a:rPr>
-              <a:t> — Build · thin, light · medium · sturdy, heavier</a:t>
-            </a:r>
-            <a:endParaRPr lang="en-US" sz="1200" dirty="0"/>
-          </a:p>
-          <a:p>
-            <a:pPr algn="l" marL="342900" indent="-342900">
-              <a:lnSpc>
-                <a:spcPts val="1620"/>
-              </a:lnSpc>
-              <a:spcAft>
-                <a:spcPts val="300"/>
-              </a:spcAft>
-              <a:buSzPct val="100000"/>
-              <a:buChar char="•"/>
-            </a:pPr>
-            <a:r>
-              <a:rPr lang="en-US" sz="1200" b="1" dirty="0">
-                <a:solidFill>
-                  <a:srgbClr val="1C2833"/>
-                </a:solidFill>
-                <a:latin typeface="Arial" pitchFamily="34" charset="0"/>
-                <a:ea typeface="Arial" pitchFamily="34" charset="-122"/>
-                <a:cs typeface="Arial" pitchFamily="34" charset="-120"/>
-              </a:rPr>
-              <a:t>2</a:t>
-            </a:r>
-            <a:pPr algn="l" indent="0" marL="0">
-              <a:lnSpc>
-                <a:spcPts val="1620"/>
-              </a:lnSpc>
-              <a:spcAft>
-                <a:spcPts val="300"/>
-              </a:spcAft>
-              <a:buNone/>
-            </a:pPr>
-            <a:r>
-              <a:rPr lang="en-US" sz="1200" dirty="0">
-                <a:solidFill>
-                  <a:srgbClr val="1C2833"/>
-                </a:solidFill>
-                <a:latin typeface="Arial" pitchFamily="34" charset="0"/>
-                <a:ea typeface="Arial" pitchFamily="34" charset="-122"/>
-                <a:cs typeface="Arial" pitchFamily="34" charset="-120"/>
-              </a:rPr>
-              <a:t> — Skin · dry, cool · warm, sensitive · smooth, oily</a:t>
-            </a:r>
-            <a:endParaRPr lang="en-US" sz="1200" dirty="0"/>
-          </a:p>
-          <a:p>
-            <a:pPr algn="l" marL="342900" indent="-342900">
-              <a:lnSpc>
-                <a:spcPts val="1620"/>
-              </a:lnSpc>
-              <a:spcAft>
-                <a:spcPts val="300"/>
-              </a:spcAft>
-              <a:buSzPct val="100000"/>
-              <a:buChar char="•"/>
-            </a:pPr>
-            <a:r>
-              <a:rPr lang="en-US" sz="1200" b="1" dirty="0">
-                <a:solidFill>
-                  <a:srgbClr val="1C2833"/>
-                </a:solidFill>
-                <a:latin typeface="Arial" pitchFamily="34" charset="0"/>
-                <a:ea typeface="Arial" pitchFamily="34" charset="-122"/>
-                <a:cs typeface="Arial" pitchFamily="34" charset="-120"/>
-              </a:rPr>
-              <a:t>3</a:t>
-            </a:r>
-            <a:pPr algn="l" indent="0" marL="0">
-              <a:lnSpc>
-                <a:spcPts val="1620"/>
-              </a:lnSpc>
-              <a:spcAft>
-                <a:spcPts val="300"/>
-              </a:spcAft>
-              <a:buNone/>
-            </a:pPr>
-            <a:r>
-              <a:rPr lang="en-US" sz="1200" dirty="0">
-                <a:solidFill>
-                  <a:srgbClr val="1C2833"/>
-                </a:solidFill>
-                <a:latin typeface="Arial" pitchFamily="34" charset="0"/>
-                <a:ea typeface="Arial" pitchFamily="34" charset="-122"/>
-                <a:cs typeface="Arial" pitchFamily="34" charset="-120"/>
-              </a:rPr>
-              <a:t> — Energy · bursts and lulls · strong and focused · steady, slow</a:t>
-            </a:r>
-            <a:endParaRPr lang="en-US" sz="1200" dirty="0"/>
-          </a:p>
-          <a:p>
-            <a:pPr algn="l" marL="342900" indent="-342900">
-              <a:lnSpc>
-                <a:spcPts val="1620"/>
-              </a:lnSpc>
-              <a:spcAft>
-                <a:spcPts val="300"/>
-              </a:spcAft>
-              <a:buSzPct val="100000"/>
-              <a:buChar char="•"/>
-            </a:pPr>
-            <a:r>
-              <a:rPr lang="en-US" sz="1200" b="1" dirty="0">
-                <a:solidFill>
-                  <a:srgbClr val="1C2833"/>
-                </a:solidFill>
-                <a:latin typeface="Arial" pitchFamily="34" charset="0"/>
-                <a:ea typeface="Arial" pitchFamily="34" charset="-122"/>
-                <a:cs typeface="Arial" pitchFamily="34" charset="-120"/>
-              </a:rPr>
-              <a:t>4</a:t>
-            </a:r>
-            <a:pPr algn="l" indent="0" marL="0">
-              <a:lnSpc>
-                <a:spcPts val="1620"/>
-              </a:lnSpc>
-              <a:spcAft>
-                <a:spcPts val="300"/>
-              </a:spcAft>
-              <a:buNone/>
-            </a:pPr>
-            <a:r>
-              <a:rPr lang="en-US" sz="1200" dirty="0">
-                <a:solidFill>
-                  <a:srgbClr val="1C2833"/>
-                </a:solidFill>
-                <a:latin typeface="Arial" pitchFamily="34" charset="0"/>
-                <a:ea typeface="Arial" pitchFamily="34" charset="-122"/>
-                <a:cs typeface="Arial" pitchFamily="34" charset="-120"/>
-              </a:rPr>
-              <a:t> — Hunger · irregular · strong, can't skip · mild, can skip</a:t>
-            </a:r>
-            <a:endParaRPr lang="en-US" sz="1200" dirty="0"/>
-          </a:p>
-          <a:p>
-            <a:pPr algn="l" marL="342900" indent="-342900">
-              <a:lnSpc>
-                <a:spcPts val="1620"/>
-              </a:lnSpc>
-              <a:spcAft>
-                <a:spcPts val="300"/>
-              </a:spcAft>
-              <a:buSzPct val="100000"/>
-              <a:buChar char="•"/>
-            </a:pPr>
-            <a:r>
-              <a:rPr lang="en-US" sz="1200" b="1" dirty="0">
-                <a:solidFill>
-                  <a:srgbClr val="1C2833"/>
-                </a:solidFill>
-                <a:latin typeface="Arial" pitchFamily="34" charset="0"/>
-                <a:ea typeface="Arial" pitchFamily="34" charset="-122"/>
-                <a:cs typeface="Arial" pitchFamily="34" charset="-120"/>
-              </a:rPr>
-              <a:t>5</a:t>
-            </a:r>
-            <a:pPr algn="l" indent="0" marL="0">
-              <a:lnSpc>
-                <a:spcPts val="1620"/>
-              </a:lnSpc>
-              <a:spcAft>
-                <a:spcPts val="300"/>
-              </a:spcAft>
-              <a:buNone/>
-            </a:pPr>
-            <a:r>
-              <a:rPr lang="en-US" sz="1200" dirty="0">
-                <a:solidFill>
-                  <a:srgbClr val="1C2833"/>
-                </a:solidFill>
-                <a:latin typeface="Arial" pitchFamily="34" charset="0"/>
-                <a:ea typeface="Arial" pitchFamily="34" charset="-122"/>
-                <a:cs typeface="Arial" pitchFamily="34" charset="-120"/>
-              </a:rPr>
-              <a:t> — Sleep · light, easily disturbed · sound, normal · deep, long</a:t>
-            </a:r>
-            <a:endParaRPr lang="en-US" sz="1200" dirty="0"/>
-          </a:p>
-          <a:p>
-            <a:pPr algn="l" marL="342900" indent="-342900">
-              <a:lnSpc>
-                <a:spcPts val="1620"/>
-              </a:lnSpc>
-              <a:spcAft>
-                <a:spcPts val="300"/>
-              </a:spcAft>
-              <a:buSzPct val="100000"/>
-              <a:buChar char="•"/>
-            </a:pPr>
-            <a:r>
-              <a:rPr lang="en-US" sz="1200" b="1" dirty="0">
-                <a:solidFill>
-                  <a:srgbClr val="1C2833"/>
-                </a:solidFill>
-                <a:latin typeface="Arial" pitchFamily="34" charset="0"/>
-                <a:ea typeface="Arial" pitchFamily="34" charset="-122"/>
-                <a:cs typeface="Arial" pitchFamily="34" charset="-120"/>
-              </a:rPr>
-              <a:t>6</a:t>
-            </a:r>
-            <a:pPr algn="l" indent="0" marL="0">
-              <a:lnSpc>
-                <a:spcPts val="1620"/>
-              </a:lnSpc>
-              <a:spcAft>
-                <a:spcPts val="300"/>
-              </a:spcAft>
-              <a:buNone/>
-            </a:pPr>
-            <a:r>
-              <a:rPr lang="en-US" sz="1200" dirty="0">
-                <a:solidFill>
-                  <a:srgbClr val="1C2833"/>
-                </a:solidFill>
-                <a:latin typeface="Arial" pitchFamily="34" charset="0"/>
-                <a:ea typeface="Arial" pitchFamily="34" charset="-122"/>
-                <a:cs typeface="Arial" pitchFamily="34" charset="-120"/>
-              </a:rPr>
-              <a:t> — Speech · fast, talkative · sharp, persuasive · slow, calm</a:t>
-            </a:r>
-            <a:endParaRPr lang="en-US" sz="1200" dirty="0"/>
-          </a:p>
-          <a:p>
-            <a:pPr algn="l" marL="342900" indent="-342900">
-              <a:lnSpc>
-                <a:spcPts val="1620"/>
-              </a:lnSpc>
-              <a:spcAft>
-                <a:spcPts val="300"/>
-              </a:spcAft>
-              <a:buSzPct val="100000"/>
-              <a:buChar char="•"/>
-            </a:pPr>
-            <a:r>
-              <a:rPr lang="en-US" sz="1200" b="1" dirty="0">
-                <a:solidFill>
-                  <a:srgbClr val="1C2833"/>
-                </a:solidFill>
-                <a:latin typeface="Arial" pitchFamily="34" charset="0"/>
-                <a:ea typeface="Arial" pitchFamily="34" charset="-122"/>
-                <a:cs typeface="Arial" pitchFamily="34" charset="-120"/>
-              </a:rPr>
-              <a:t>7</a:t>
-            </a:r>
-            <a:pPr algn="l" indent="0" marL="0">
-              <a:lnSpc>
-                <a:spcPts val="1620"/>
-              </a:lnSpc>
-              <a:spcAft>
-                <a:spcPts val="300"/>
-              </a:spcAft>
-              <a:buNone/>
-            </a:pPr>
-            <a:r>
-              <a:rPr lang="en-US" sz="1200" dirty="0">
-                <a:solidFill>
-                  <a:srgbClr val="1C2833"/>
-                </a:solidFill>
-                <a:latin typeface="Arial" pitchFamily="34" charset="0"/>
-                <a:ea typeface="Arial" pitchFamily="34" charset="-122"/>
-                <a:cs typeface="Arial" pitchFamily="34" charset="-120"/>
-              </a:rPr>
-              <a:t> — Memory · quick to learn, quick to forget · sharp, decisive · slow, lasting</a:t>
-            </a:r>
-            <a:endParaRPr lang="en-US" sz="1200" dirty="0"/>
-          </a:p>
-          <a:p>
-            <a:pPr algn="l" marL="342900" indent="-342900">
-              <a:lnSpc>
-                <a:spcPts val="1620"/>
-              </a:lnSpc>
-              <a:spcAft>
-                <a:spcPts val="300"/>
-              </a:spcAft>
-              <a:buSzPct val="100000"/>
-              <a:buChar char="•"/>
-            </a:pPr>
-            <a:r>
-              <a:rPr lang="en-US" sz="1200" b="1" dirty="0">
-                <a:solidFill>
-                  <a:srgbClr val="1C2833"/>
-                </a:solidFill>
-                <a:latin typeface="Arial" pitchFamily="34" charset="0"/>
-                <a:ea typeface="Arial" pitchFamily="34" charset="-122"/>
-                <a:cs typeface="Arial" pitchFamily="34" charset="-120"/>
-              </a:rPr>
-              <a:t>8</a:t>
-            </a:r>
-            <a:pPr algn="l" indent="0" marL="0">
-              <a:lnSpc>
-                <a:spcPts val="1620"/>
-              </a:lnSpc>
-              <a:spcAft>
-                <a:spcPts val="300"/>
-              </a:spcAft>
-              <a:buNone/>
-            </a:pPr>
-            <a:r>
-              <a:rPr lang="en-US" sz="1200" dirty="0">
-                <a:solidFill>
-                  <a:srgbClr val="1C2833"/>
-                </a:solidFill>
-                <a:latin typeface="Arial" pitchFamily="34" charset="0"/>
-                <a:ea typeface="Arial" pitchFamily="34" charset="-122"/>
-                <a:cs typeface="Arial" pitchFamily="34" charset="-120"/>
-              </a:rPr>
-              <a:t> — Stress · anxious, worried · irritable, frustrated · withdrawn, slow</a:t>
-            </a:r>
-            <a:endParaRPr lang="en-US" sz="1200" dirty="0"/>
-          </a:p>
-          <a:p>
-            <a:pPr algn="l" marL="342900" indent="-342900">
-              <a:lnSpc>
-                <a:spcPts val="1620"/>
-              </a:lnSpc>
-              <a:spcAft>
-                <a:spcPts val="300"/>
-              </a:spcAft>
-              <a:buSzPct val="100000"/>
-              <a:buChar char="•"/>
-            </a:pPr>
-            <a:r>
-              <a:rPr lang="en-US" sz="1200" b="1" dirty="0">
-                <a:solidFill>
-                  <a:srgbClr val="1C2833"/>
-                </a:solidFill>
-                <a:latin typeface="Arial" pitchFamily="34" charset="0"/>
-                <a:ea typeface="Arial" pitchFamily="34" charset="-122"/>
-                <a:cs typeface="Arial" pitchFamily="34" charset="-120"/>
-              </a:rPr>
-              <a:t>9</a:t>
-            </a:r>
-            <a:pPr algn="l" indent="0" marL="0">
-              <a:lnSpc>
-                <a:spcPts val="1620"/>
-              </a:lnSpc>
-              <a:spcAft>
-                <a:spcPts val="300"/>
-              </a:spcAft>
-              <a:buNone/>
-            </a:pPr>
-            <a:r>
-              <a:rPr lang="en-US" sz="1200" dirty="0">
-                <a:solidFill>
-                  <a:srgbClr val="1C2833"/>
-                </a:solidFill>
-                <a:latin typeface="Arial" pitchFamily="34" charset="0"/>
-                <a:ea typeface="Arial" pitchFamily="34" charset="-122"/>
-                <a:cs typeface="Arial" pitchFamily="34" charset="-120"/>
-              </a:rPr>
-              <a:t> — Weather preferred · warm · cool · warm and dry</a:t>
-            </a:r>
-            <a:endParaRPr lang="en-US" sz="1200" dirty="0"/>
-          </a:p>
-          <a:p>
-            <a:pPr algn="l" marL="342900" indent="-342900">
-              <a:lnSpc>
-                <a:spcPts val="1620"/>
-              </a:lnSpc>
-              <a:spcAft>
-                <a:spcPts val="300"/>
-              </a:spcAft>
-              <a:buSzPct val="100000"/>
-              <a:buChar char="•"/>
-            </a:pPr>
-            <a:r>
-              <a:rPr lang="en-US" sz="1200" b="1" dirty="0">
-                <a:solidFill>
-                  <a:srgbClr val="1C2833"/>
-                </a:solidFill>
-                <a:latin typeface="Arial" pitchFamily="34" charset="0"/>
-                <a:ea typeface="Arial" pitchFamily="34" charset="-122"/>
-                <a:cs typeface="Arial" pitchFamily="34" charset="-120"/>
-              </a:rPr>
-              <a:t>10</a:t>
-            </a:r>
-            <a:pPr algn="l" indent="0" marL="0">
-              <a:lnSpc>
-                <a:spcPts val="1620"/>
-              </a:lnSpc>
-              <a:spcAft>
-                <a:spcPts val="300"/>
-              </a:spcAft>
-              <a:buNone/>
-            </a:pPr>
-            <a:r>
-              <a:rPr lang="en-US" sz="1200" dirty="0">
-                <a:solidFill>
-                  <a:srgbClr val="1C2833"/>
-                </a:solidFill>
-                <a:latin typeface="Arial" pitchFamily="34" charset="0"/>
-                <a:ea typeface="Arial" pitchFamily="34" charset="-122"/>
-                <a:cs typeface="Arial" pitchFamily="34" charset="-120"/>
-              </a:rPr>
-              <a:t> — Walking · fast · medium · slow</a:t>
-            </a:r>
-            <a:endParaRPr lang="en-US" sz="1200" dirty="0"/>
-          </a:p>
-          <a:p>
-            <a:pPr algn="l" marL="342900" indent="-342900">
-              <a:lnSpc>
-                <a:spcPts val="1620"/>
-              </a:lnSpc>
-              <a:spcAft>
-                <a:spcPts val="300"/>
-              </a:spcAft>
-              <a:buSzPct val="100000"/>
-              <a:buChar char="•"/>
-            </a:pPr>
-            <a:r>
-              <a:rPr lang="en-US" sz="1200" b="1" dirty="0">
-                <a:solidFill>
-                  <a:srgbClr val="1C2833"/>
-                </a:solidFill>
-                <a:latin typeface="Arial" pitchFamily="34" charset="0"/>
-                <a:ea typeface="Arial" pitchFamily="34" charset="-122"/>
-                <a:cs typeface="Arial" pitchFamily="34" charset="-120"/>
-              </a:rPr>
-              <a:t>11</a:t>
-            </a:r>
-            <a:pPr algn="l" indent="0" marL="0">
-              <a:lnSpc>
-                <a:spcPts val="1620"/>
-              </a:lnSpc>
-              <a:spcAft>
-                <a:spcPts val="300"/>
-              </a:spcAft>
-              <a:buNone/>
-            </a:pPr>
-            <a:r>
-              <a:rPr lang="en-US" sz="1200" dirty="0">
-                <a:solidFill>
-                  <a:srgbClr val="1C2833"/>
-                </a:solidFill>
-                <a:latin typeface="Arial" pitchFamily="34" charset="0"/>
-                <a:ea typeface="Arial" pitchFamily="34" charset="-122"/>
-                <a:cs typeface="Arial" pitchFamily="34" charset="-120"/>
-              </a:rPr>
-              <a:t> — Hands &amp; feet · cold · warm · cool, moist</a:t>
-            </a:r>
-            <a:endParaRPr lang="en-US" sz="1200" dirty="0"/>
-          </a:p>
-          <a:p>
-            <a:pPr algn="l" marL="342900" indent="-342900">
-              <a:lnSpc>
-                <a:spcPts val="1620"/>
-              </a:lnSpc>
-              <a:spcAft>
-                <a:spcPts val="300"/>
-              </a:spcAft>
-              <a:buSzPct val="100000"/>
-              <a:buChar char="•"/>
-            </a:pPr>
-            <a:r>
-              <a:rPr lang="en-US" sz="1200" b="1" dirty="0">
-                <a:solidFill>
-                  <a:srgbClr val="1C2833"/>
-                </a:solidFill>
-                <a:latin typeface="Arial" pitchFamily="34" charset="0"/>
-                <a:ea typeface="Arial" pitchFamily="34" charset="-122"/>
-                <a:cs typeface="Arial" pitchFamily="34" charset="-120"/>
-              </a:rPr>
-              <a:t>12</a:t>
-            </a:r>
-            <a:pPr algn="l" indent="0" marL="0">
-              <a:lnSpc>
-                <a:spcPts val="1620"/>
-              </a:lnSpc>
-              <a:spcAft>
-                <a:spcPts val="300"/>
-              </a:spcAft>
-              <a:buNone/>
-            </a:pPr>
-            <a:r>
-              <a:rPr lang="en-US" sz="1200" dirty="0">
-                <a:solidFill>
-                  <a:srgbClr val="1C2833"/>
-                </a:solidFill>
-                <a:latin typeface="Arial" pitchFamily="34" charset="0"/>
-                <a:ea typeface="Arial" pitchFamily="34" charset="-122"/>
-                <a:cs typeface="Arial" pitchFamily="34" charset="-120"/>
-              </a:rPr>
-              <a:t> — Spending · impulsive · calculated · careful, saver</a:t>
-            </a:r>
-            <a:endParaRPr lang="en-US" sz="1200" dirty="0"/>
-          </a:p>
-        </p:txBody>
-      </p:sp>
-      <p:sp>
-        <p:nvSpPr>
-          <p:cNvPr id="9" name="Text 7"/>
-          <p:cNvSpPr/>
-          <p:nvPr/>
-        </p:nvSpPr>
-        <p:spPr>
-          <a:xfrm>
-            <a:off x="406301" y="5140821"/>
-            <a:ext cx="8498026" cy="213271"/>
-          </a:xfrm>
-          <a:prstGeom prst="rect">
-            <a:avLst/>
-          </a:prstGeom>
-          <a:noFill/>
-          <a:ln/>
-        </p:spPr>
-        <p:txBody>
-          <a:bodyPr wrap="square" lIns="0" tIns="0" rIns="0" bIns="0" rtlCol="0" anchor="t"/>
-          <a:lstStyle/>
-          <a:p>
-            <a:pPr algn="l" indent="0" marL="0">
-              <a:lnSpc>
-                <a:spcPts val="1680"/>
+                <a:spcPts val="1820"/>
               </a:lnSpc>
               <a:spcBef>
                 <a:spcPts val="300"/>
@@ -4868,111 +5487,17 @@
               <a:buNone/>
             </a:pPr>
             <a:r>
-              <a:rPr lang="en-US" sz="1200" dirty="0">
-                <a:solidFill>
-                  <a:srgbClr val="1C2833"/>
-                </a:solidFill>
-                <a:latin typeface="Arial" pitchFamily="34" charset="0"/>
-                <a:ea typeface="Arial" pitchFamily="34" charset="-122"/>
-                <a:cs typeface="Arial" pitchFamily="34" charset="-120"/>
-              </a:rPr>
-              <a:t>Total: V = ___, P = ___, K = ___</a:t>
-            </a:r>
-            <a:endParaRPr lang="en-US" sz="1200" dirty="0"/>
-          </a:p>
-        </p:txBody>
-      </p:sp>
-      <p:sp>
-        <p:nvSpPr>
-          <p:cNvPr id="10" name="Text 8"/>
-          <p:cNvSpPr/>
-          <p:nvPr/>
-        </p:nvSpPr>
-        <p:spPr>
-          <a:xfrm>
-            <a:off x="406301" y="5430292"/>
-            <a:ext cx="8498026" cy="213271"/>
-          </a:xfrm>
-          <a:prstGeom prst="rect">
-            <a:avLst/>
-          </a:prstGeom>
-          <a:noFill/>
-          <a:ln/>
-        </p:spPr>
-        <p:txBody>
-          <a:bodyPr wrap="square" lIns="0" tIns="0" rIns="0" bIns="0" rtlCol="0" anchor="t"/>
-          <a:lstStyle/>
-          <a:p>
-            <a:pPr algn="l" indent="0" marL="0">
-              <a:lnSpc>
-                <a:spcPts val="1680"/>
-              </a:lnSpc>
-              <a:spcBef>
-                <a:spcPts val="300"/>
-              </a:spcBef>
-              <a:spcAft>
-                <a:spcPts val="300"/>
-              </a:spcAft>
-              <a:buNone/>
-            </a:pPr>
-            <a:r>
-              <a:rPr lang="en-US" sz="1200" dirty="0">
-                <a:solidFill>
-                  <a:srgbClr val="1C2833"/>
-                </a:solidFill>
-                <a:latin typeface="Arial" pitchFamily="34" charset="0"/>
-                <a:ea typeface="Arial" pitchFamily="34" charset="-122"/>
-                <a:cs typeface="Arial" pitchFamily="34" charset="-120"/>
-              </a:rPr>
-              <a:t>The largest score = your </a:t>
-            </a:r>
-            <a:pPr algn="l" indent="0" marL="0">
-              <a:lnSpc>
-                <a:spcPts val="1680"/>
-              </a:lnSpc>
-              <a:spcBef>
-                <a:spcPts val="300"/>
-              </a:spcBef>
-              <a:spcAft>
-                <a:spcPts val="300"/>
-              </a:spcAft>
-              <a:buNone/>
-            </a:pPr>
-            <a:r>
-              <a:rPr lang="en-US" sz="1200" i="1" dirty="0">
-                <a:solidFill>
-                  <a:srgbClr val="1C2833"/>
-                </a:solidFill>
-                <a:latin typeface="Arial" pitchFamily="34" charset="0"/>
-                <a:ea typeface="Arial" pitchFamily="34" charset="-122"/>
-                <a:cs typeface="Arial" pitchFamily="34" charset="-120"/>
-              </a:rPr>
-              <a:t>current</a:t>
-            </a:r>
-            <a:pPr algn="l" indent="0" marL="0">
-              <a:lnSpc>
-                <a:spcPts val="1680"/>
-              </a:lnSpc>
-              <a:spcBef>
-                <a:spcPts val="300"/>
-              </a:spcBef>
-              <a:spcAft>
-                <a:spcPts val="300"/>
-              </a:spcAft>
-              <a:buNone/>
-            </a:pPr>
-            <a:r>
-              <a:rPr lang="en-US" sz="1200" dirty="0">
-                <a:solidFill>
-                  <a:srgbClr val="1C2833"/>
-                </a:solidFill>
-                <a:latin typeface="Arial" pitchFamily="34" charset="0"/>
-                <a:ea typeface="Arial" pitchFamily="34" charset="-122"/>
-                <a:cs typeface="Arial" pitchFamily="34" charset="-120"/>
-              </a:rPr>
-              <a:t> dosha tilt. Note: this is a snapshot, not your identity.</a:t>
-            </a:r>
-            <a:endParaRPr lang="en-US" sz="1200" dirty="0"/>
+              <a:rPr lang="en-US" sz="1300" i="1" dirty="0">
+                <a:solidFill>
+                  <a:srgbClr val="1C2833"/>
+                </a:solidFill>
+                <a:latin typeface="Georgia" pitchFamily="34" charset="0"/>
+                <a:ea typeface="Georgia" pitchFamily="34" charset="-122"/>
+                <a:cs typeface="Georgia" pitchFamily="34" charset="-120"/>
+              </a:rPr>
+              <a:t>Everyone has all three doshas.</a:t>
+            </a:r>
+            <a:endParaRPr lang="en-US" sz="1300" dirty="0"/>
           </a:p>
         </p:txBody>
       </p:sp>
@@ -4984,7 +5509,7 @@
         </p:nvSpPr>
         <p:spPr>
           <a:xfrm>
-            <a:off x="406301" y="5795963"/>
+            <a:off x="406301" y="4434929"/>
             <a:ext cx="8498026" cy="213271"/>
           </a:xfrm>
           <a:prstGeom prst="rect">
@@ -5128,7 +5653,7 @@
                 <a:ea typeface="Georgia" pitchFamily="34" charset="-122"/>
                 <a:cs typeface="Georgia" pitchFamily="34" charset="-120"/>
               </a:rPr>
-              <a:t>Discussion (15 min)</a:t>
+              <a:t>The disclaimer (5 min) — TEACHER FRAMING IS CRITICAL (cont.)</a:t>
             </a:r>
             <a:endParaRPr lang="en-US" sz="1800" dirty="0"/>
           </a:p>
@@ -5143,7 +5668,7 @@
         <p:spPr>
           <a:xfrm>
             <a:off x="406301" y="870942"/>
-            <a:ext cx="8498026" cy="426541"/>
+            <a:ext cx="8498026" cy="213271"/>
           </a:xfrm>
           <a:prstGeom prst="rect">
             <a:avLst/>
@@ -5176,53 +5701,7 @@
                 <a:ea typeface="Arial" pitchFamily="34" charset="-122"/>
                 <a:cs typeface="Arial" pitchFamily="34" charset="-120"/>
               </a:rPr>
-              <a:t>– Share-of-hands: how many are predominantly Vāta? Pitta? Kapha? Mixed? – Reinforce: </a:t>
-            </a:r>
-            <a:pPr algn="l" indent="0" marL="0">
-              <a:lnSpc>
-                <a:spcPts val="1680"/>
-              </a:lnSpc>
-              <a:spcBef>
-                <a:spcPts val="300"/>
-              </a:spcBef>
-              <a:spcAft>
-                <a:spcPts val="300"/>
-              </a:spcAft>
-              <a:buNone/>
-            </a:pPr>
-            <a:r>
-              <a:rPr lang="en-US" sz="1200" i="1" dirty="0">
-                <a:solidFill>
-                  <a:srgbClr val="1C2833"/>
-                </a:solidFill>
-                <a:latin typeface="Arial" pitchFamily="34" charset="0"/>
-                <a:ea typeface="Arial" pitchFamily="34" charset="-122"/>
-                <a:cs typeface="Arial" pitchFamily="34" charset="-120"/>
-              </a:rPr>
-              <a:t>"This is a tendency observation, not a verdict."</a:t>
-            </a:r>
-            <a:pPr algn="l" indent="0" marL="0">
-              <a:lnSpc>
-                <a:spcPts val="1680"/>
-              </a:lnSpc>
-              <a:spcBef>
-                <a:spcPts val="300"/>
-              </a:spcBef>
-              <a:spcAft>
-                <a:spcPts val="300"/>
-              </a:spcAft>
-              <a:buNone/>
-            </a:pPr>
-            <a:r>
-              <a:rPr lang="en-US" sz="1200" dirty="0">
-                <a:solidFill>
-                  <a:srgbClr val="1C2833"/>
-                </a:solidFill>
-                <a:latin typeface="Arial" pitchFamily="34" charset="0"/>
-                <a:ea typeface="Arial" pitchFamily="34" charset="-122"/>
-                <a:cs typeface="Arial" pitchFamily="34" charset="-120"/>
-              </a:rPr>
-              <a:t> – Discuss: did anyone get a result that surprised them?</a:t>
+              <a:t>Make the class chorus this last line out loud.</a:t>
             </a:r>
             <a:endParaRPr lang="en-US" sz="1200" dirty="0"/>
           </a:p>
@@ -5380,7 +5859,7 @@
                 <a:ea typeface="Georgia" pitchFamily="34" charset="-122"/>
                 <a:cs typeface="Georgia" pitchFamily="34" charset="-120"/>
               </a:rPr>
-              <a:t>Wrap-up (5 min)</a:t>
+              <a:t>Self-assessment (15 min)</a:t>
             </a:r>
             <a:endParaRPr lang="en-US" sz="1800" dirty="0"/>
           </a:p>
@@ -5395,7 +5874,7 @@
         <p:spPr>
           <a:xfrm>
             <a:off x="406301" y="870942"/>
-            <a:ext cx="8498026" cy="426541"/>
+            <a:ext cx="8498026" cy="213271"/>
           </a:xfrm>
           <a:prstGeom prst="rect">
             <a:avLst/>
@@ -5428,9 +5907,79 @@
                 <a:ea typeface="Arial" pitchFamily="34" charset="-122"/>
                 <a:cs typeface="Arial" pitchFamily="34" charset="-120"/>
               </a:rPr>
-              <a:t>– Preview Day 4: </a:t>
-            </a:r>
+              <a:t>Hand out worksheet (sample below). Students answer honestly. Tally V / P / K.</a:t>
+            </a:r>
+            <a:endParaRPr lang="en-US" sz="1200" dirty="0"/>
+          </a:p>
+        </p:txBody>
+      </p:sp>
+      <p:sp>
+        <p:nvSpPr>
+          <p:cNvPr id="5" name="Text 3"/>
+          <p:cNvSpPr/>
+          <p:nvPr/>
+        </p:nvSpPr>
+        <p:spPr>
+          <a:xfrm>
+            <a:off x="406301" y="1198513"/>
+            <a:ext cx="8498026" cy="209550"/>
+          </a:xfrm>
+          <a:prstGeom prst="rect">
+            <a:avLst/>
+          </a:prstGeom>
+          <a:noFill/>
+          <a:ln/>
+        </p:spPr>
+        <p:txBody>
+          <a:bodyPr wrap="square" lIns="0" tIns="0" rIns="0" bIns="0" rtlCol="0" anchor="t"/>
+          <a:lstStyle/>
+          <a:p>
             <a:pPr algn="l" indent="0" marL="0">
+              <a:spcBef>
+                <a:spcPts val="600"/>
+              </a:spcBef>
+              <a:spcAft>
+                <a:spcPts val="400"/>
+              </a:spcAft>
+              <a:buNone/>
+            </a:pPr>
+            <a:r>
+              <a:rPr lang="en-US" sz="1400" b="1" dirty="0">
+                <a:solidFill>
+                  <a:srgbClr val="1C2833"/>
+                </a:solidFill>
+                <a:latin typeface="Arial" pitchFamily="34" charset="0"/>
+                <a:ea typeface="Arial" pitchFamily="34" charset="-122"/>
+                <a:cs typeface="Arial" pitchFamily="34" charset="-120"/>
+              </a:rPr>
+              <a:t>Worksheet (12 questions, 3 each per dosha)</a:t>
+            </a:r>
+            <a:endParaRPr lang="en-US" sz="1400" dirty="0"/>
+          </a:p>
+        </p:txBody>
+      </p:sp>
+      <p:sp>
+        <p:nvSpPr>
+          <p:cNvPr id="6" name="Text 4"/>
+          <p:cNvSpPr/>
+          <p:nvPr/>
+        </p:nvSpPr>
+        <p:spPr>
+          <a:xfrm>
+            <a:off x="406301" y="1496913"/>
+            <a:ext cx="8498026" cy="213271"/>
+          </a:xfrm>
+          <a:prstGeom prst="rect">
+            <a:avLst/>
+          </a:prstGeom>
+          <a:noFill/>
+          <a:ln/>
+        </p:spPr>
+        <p:txBody>
+          <a:bodyPr wrap="square" lIns="0" tIns="0" rIns="0" bIns="0" rtlCol="0" anchor="t"/>
+          <a:lstStyle/>
+          <a:p>
+            <a:pPr algn="l" indent="0" marL="0">
               <a:lnSpc>
                 <a:spcPts val="1680"/>
               </a:lnSpc>
@@ -5443,6 +5992,54 @@
               <a:buNone/>
             </a:pPr>
             <a:r>
+              <a:rPr lang="en-US" sz="1200" dirty="0">
+                <a:solidFill>
+                  <a:srgbClr val="1C2833"/>
+                </a:solidFill>
+                <a:latin typeface="Arial" pitchFamily="34" charset="0"/>
+                <a:ea typeface="Arial" pitchFamily="34" charset="-122"/>
+                <a:cs typeface="Arial" pitchFamily="34" charset="-120"/>
+              </a:rPr>
+              <a:t>For each, circle the option closest to you:</a:t>
+            </a:r>
+            <a:endParaRPr lang="en-US" sz="1200" dirty="0"/>
+          </a:p>
+        </p:txBody>
+      </p:sp>
+      <p:sp>
+        <p:nvSpPr>
+          <p:cNvPr id="7" name="Text 5"/>
+          <p:cNvSpPr/>
+          <p:nvPr/>
+        </p:nvSpPr>
+        <p:spPr>
+          <a:xfrm>
+            <a:off x="406301" y="1786384"/>
+            <a:ext cx="8498026" cy="213271"/>
+          </a:xfrm>
+          <a:prstGeom prst="rect">
+            <a:avLst/>
+          </a:prstGeom>
+          <a:noFill/>
+          <a:ln/>
+        </p:spPr>
+        <p:txBody>
+          <a:bodyPr wrap="square" lIns="0" tIns="0" rIns="0" bIns="0" rtlCol="0" anchor="t"/>
+          <a:lstStyle/>
+          <a:p>
+            <a:pPr algn="l" indent="0" marL="0">
+              <a:lnSpc>
+                <a:spcPts val="1680"/>
+              </a:lnSpc>
+              <a:spcBef>
+                <a:spcPts val="300"/>
+              </a:spcBef>
+              <a:spcAft>
+                <a:spcPts val="300"/>
+              </a:spcAft>
+              <a:buNone/>
+            </a:pPr>
+            <a:r>
               <a:rPr lang="en-US" sz="1200" i="1" dirty="0">
                 <a:solidFill>
                   <a:srgbClr val="1C2833"/>
@@ -5451,7 +6048,7 @@
                 <a:ea typeface="Arial" pitchFamily="34" charset="-122"/>
                 <a:cs typeface="Arial" pitchFamily="34" charset="-120"/>
               </a:rPr>
-              <a:t>"Tomorrow — Dinacharya. The daily routine that tradition recommends for keeping all three doshas in balance."</a:t>
+              <a:t>Each row: # · Question · V · P · K.</a:t>
             </a:r>
             <a:endParaRPr lang="en-US" sz="1200" dirty="0"/>
           </a:p>
@@ -5459,7 +6056,7 @@
       </p:sp>
       <p:sp>
         <p:nvSpPr>
-          <p:cNvPr id="5" name="Text 3"/>
+          <p:cNvPr id="8" name="Text 6"/>
           <p:cNvSpPr/>
           <p:nvPr/>
         </p:nvSpPr>
@@ -5609,7 +6206,7 @@
                 <a:ea typeface="Georgia" pitchFamily="34" charset="-122"/>
                 <a:cs typeface="Georgia" pitchFamily="34" charset="-120"/>
               </a:rPr>
-              <a:t>Homework</a:t>
+              <a:t>Self-assessment (15 min) (cont.)</a:t>
             </a:r>
             <a:endParaRPr lang="en-US" sz="1800" dirty="0"/>
           </a:p>
@@ -5623,8 +6220,8 @@
         </p:nvSpPr>
         <p:spPr>
           <a:xfrm>
-            <a:off x="406301" y="870942"/>
-            <a:ext cx="8498026" cy="213271"/>
+            <a:off x="634901" y="883593"/>
+            <a:ext cx="8102798" cy="2232124"/>
           </a:xfrm>
           <a:prstGeom prst="rect">
             <a:avLst/>
@@ -5636,13 +6233,31 @@
           <a:bodyPr wrap="square" lIns="0" tIns="0" rIns="0" bIns="0" rtlCol="0" anchor="t"/>
           <a:lstStyle/>
           <a:p>
+            <a:pPr algn="l" marL="342900" indent="-342900">
+              <a:lnSpc>
+                <a:spcPts val="1620"/>
+              </a:lnSpc>
+              <a:spcAft>
+                <a:spcPts val="300"/>
+              </a:spcAft>
+              <a:buSzPct val="100000"/>
+              <a:buChar char="•"/>
+            </a:pPr>
+            <a:r>
+              <a:rPr lang="en-US" sz="1200" b="1" dirty="0">
+                <a:solidFill>
+                  <a:srgbClr val="1C2833"/>
+                </a:solidFill>
+                <a:latin typeface="Arial" pitchFamily="34" charset="0"/>
+                <a:ea typeface="Arial" pitchFamily="34" charset="-122"/>
+                <a:cs typeface="Arial" pitchFamily="34" charset="-120"/>
+              </a:rPr>
+              <a:t>1</a:t>
+            </a:r>
             <a:pPr algn="l" indent="0" marL="0">
               <a:lnSpc>
-                <a:spcPts val="1680"/>
-              </a:lnSpc>
-              <a:spcBef>
-                <a:spcPts val="300"/>
-              </a:spcBef>
+                <a:spcPts val="1620"/>
+              </a:lnSpc>
               <a:spcAft>
                 <a:spcPts val="300"/>
               </a:spcAft>
@@ -5657,7 +6272,359 @@
                 <a:ea typeface="Arial" pitchFamily="34" charset="-122"/>
                 <a:cs typeface="Arial" pitchFamily="34" charset="-120"/>
               </a:rPr>
-              <a:t>– Look up ONE Ayurvedic recommendation for your dominant dosha (food, sleep timing, type of exercise). Bring tomorrow.</a:t>
+              <a:t> — Build · thin, light · medium · sturdy, heavier</a:t>
+            </a:r>
+            <a:endParaRPr lang="en-US" sz="1200" dirty="0"/>
+          </a:p>
+          <a:p>
+            <a:pPr algn="l" marL="342900" indent="-342900">
+              <a:lnSpc>
+                <a:spcPts val="1620"/>
+              </a:lnSpc>
+              <a:spcAft>
+                <a:spcPts val="300"/>
+              </a:spcAft>
+              <a:buSzPct val="100000"/>
+              <a:buChar char="•"/>
+            </a:pPr>
+            <a:r>
+              <a:rPr lang="en-US" sz="1200" b="1" dirty="0">
+                <a:solidFill>
+                  <a:srgbClr val="1C2833"/>
+                </a:solidFill>
+                <a:latin typeface="Arial" pitchFamily="34" charset="0"/>
+                <a:ea typeface="Arial" pitchFamily="34" charset="-122"/>
+                <a:cs typeface="Arial" pitchFamily="34" charset="-120"/>
+              </a:rPr>
+              <a:t>2</a:t>
+            </a:r>
+            <a:pPr algn="l" indent="0" marL="0">
+              <a:lnSpc>
+                <a:spcPts val="1620"/>
+              </a:lnSpc>
+              <a:spcAft>
+                <a:spcPts val="300"/>
+              </a:spcAft>
+              <a:buNone/>
+            </a:pPr>
+            <a:r>
+              <a:rPr lang="en-US" sz="1200" dirty="0">
+                <a:solidFill>
+                  <a:srgbClr val="1C2833"/>
+                </a:solidFill>
+                <a:latin typeface="Arial" pitchFamily="34" charset="0"/>
+                <a:ea typeface="Arial" pitchFamily="34" charset="-122"/>
+                <a:cs typeface="Arial" pitchFamily="34" charset="-120"/>
+              </a:rPr>
+              <a:t> — Skin · dry, cool · warm, sensitive · smooth, oily</a:t>
+            </a:r>
+            <a:endParaRPr lang="en-US" sz="1200" dirty="0"/>
+          </a:p>
+          <a:p>
+            <a:pPr algn="l" marL="342900" indent="-342900">
+              <a:lnSpc>
+                <a:spcPts val="1620"/>
+              </a:lnSpc>
+              <a:spcAft>
+                <a:spcPts val="300"/>
+              </a:spcAft>
+              <a:buSzPct val="100000"/>
+              <a:buChar char="•"/>
+            </a:pPr>
+            <a:r>
+              <a:rPr lang="en-US" sz="1200" b="1" dirty="0">
+                <a:solidFill>
+                  <a:srgbClr val="1C2833"/>
+                </a:solidFill>
+                <a:latin typeface="Arial" pitchFamily="34" charset="0"/>
+                <a:ea typeface="Arial" pitchFamily="34" charset="-122"/>
+                <a:cs typeface="Arial" pitchFamily="34" charset="-120"/>
+              </a:rPr>
+              <a:t>3</a:t>
+            </a:r>
+            <a:pPr algn="l" indent="0" marL="0">
+              <a:lnSpc>
+                <a:spcPts val="1620"/>
+              </a:lnSpc>
+              <a:spcAft>
+                <a:spcPts val="300"/>
+              </a:spcAft>
+              <a:buNone/>
+            </a:pPr>
+            <a:r>
+              <a:rPr lang="en-US" sz="1200" dirty="0">
+                <a:solidFill>
+                  <a:srgbClr val="1C2833"/>
+                </a:solidFill>
+                <a:latin typeface="Arial" pitchFamily="34" charset="0"/>
+                <a:ea typeface="Arial" pitchFamily="34" charset="-122"/>
+                <a:cs typeface="Arial" pitchFamily="34" charset="-120"/>
+              </a:rPr>
+              <a:t> — Energy · bursts and lulls · strong and focused · steady, slow</a:t>
+            </a:r>
+            <a:endParaRPr lang="en-US" sz="1200" dirty="0"/>
+          </a:p>
+          <a:p>
+            <a:pPr algn="l" marL="342900" indent="-342900">
+              <a:lnSpc>
+                <a:spcPts val="1620"/>
+              </a:lnSpc>
+              <a:spcAft>
+                <a:spcPts val="300"/>
+              </a:spcAft>
+              <a:buSzPct val="100000"/>
+              <a:buChar char="•"/>
+            </a:pPr>
+            <a:r>
+              <a:rPr lang="en-US" sz="1200" b="1" dirty="0">
+                <a:solidFill>
+                  <a:srgbClr val="1C2833"/>
+                </a:solidFill>
+                <a:latin typeface="Arial" pitchFamily="34" charset="0"/>
+                <a:ea typeface="Arial" pitchFamily="34" charset="-122"/>
+                <a:cs typeface="Arial" pitchFamily="34" charset="-120"/>
+              </a:rPr>
+              <a:t>4</a:t>
+            </a:r>
+            <a:pPr algn="l" indent="0" marL="0">
+              <a:lnSpc>
+                <a:spcPts val="1620"/>
+              </a:lnSpc>
+              <a:spcAft>
+                <a:spcPts val="300"/>
+              </a:spcAft>
+              <a:buNone/>
+            </a:pPr>
+            <a:r>
+              <a:rPr lang="en-US" sz="1200" dirty="0">
+                <a:solidFill>
+                  <a:srgbClr val="1C2833"/>
+                </a:solidFill>
+                <a:latin typeface="Arial" pitchFamily="34" charset="0"/>
+                <a:ea typeface="Arial" pitchFamily="34" charset="-122"/>
+                <a:cs typeface="Arial" pitchFamily="34" charset="-120"/>
+              </a:rPr>
+              <a:t> — Hunger · irregular · strong, can't skip · mild, can skip</a:t>
+            </a:r>
+            <a:endParaRPr lang="en-US" sz="1200" dirty="0"/>
+          </a:p>
+          <a:p>
+            <a:pPr algn="l" marL="342900" indent="-342900">
+              <a:lnSpc>
+                <a:spcPts val="1620"/>
+              </a:lnSpc>
+              <a:spcAft>
+                <a:spcPts val="300"/>
+              </a:spcAft>
+              <a:buSzPct val="100000"/>
+              <a:buChar char="•"/>
+            </a:pPr>
+            <a:r>
+              <a:rPr lang="en-US" sz="1200" b="1" dirty="0">
+                <a:solidFill>
+                  <a:srgbClr val="1C2833"/>
+                </a:solidFill>
+                <a:latin typeface="Arial" pitchFamily="34" charset="0"/>
+                <a:ea typeface="Arial" pitchFamily="34" charset="-122"/>
+                <a:cs typeface="Arial" pitchFamily="34" charset="-120"/>
+              </a:rPr>
+              <a:t>5</a:t>
+            </a:r>
+            <a:pPr algn="l" indent="0" marL="0">
+              <a:lnSpc>
+                <a:spcPts val="1620"/>
+              </a:lnSpc>
+              <a:spcAft>
+                <a:spcPts val="300"/>
+              </a:spcAft>
+              <a:buNone/>
+            </a:pPr>
+            <a:r>
+              <a:rPr lang="en-US" sz="1200" dirty="0">
+                <a:solidFill>
+                  <a:srgbClr val="1C2833"/>
+                </a:solidFill>
+                <a:latin typeface="Arial" pitchFamily="34" charset="0"/>
+                <a:ea typeface="Arial" pitchFamily="34" charset="-122"/>
+                <a:cs typeface="Arial" pitchFamily="34" charset="-120"/>
+              </a:rPr>
+              <a:t> — Sleep · light, easily disturbed · sound, normal · deep, long</a:t>
+            </a:r>
+            <a:endParaRPr lang="en-US" sz="1200" dirty="0"/>
+          </a:p>
+          <a:p>
+            <a:pPr algn="l" marL="342900" indent="-342900">
+              <a:lnSpc>
+                <a:spcPts val="1620"/>
+              </a:lnSpc>
+              <a:spcAft>
+                <a:spcPts val="300"/>
+              </a:spcAft>
+              <a:buSzPct val="100000"/>
+              <a:buChar char="•"/>
+            </a:pPr>
+            <a:r>
+              <a:rPr lang="en-US" sz="1200" b="1" dirty="0">
+                <a:solidFill>
+                  <a:srgbClr val="1C2833"/>
+                </a:solidFill>
+                <a:latin typeface="Arial" pitchFamily="34" charset="0"/>
+                <a:ea typeface="Arial" pitchFamily="34" charset="-122"/>
+                <a:cs typeface="Arial" pitchFamily="34" charset="-120"/>
+              </a:rPr>
+              <a:t>6</a:t>
+            </a:r>
+            <a:pPr algn="l" indent="0" marL="0">
+              <a:lnSpc>
+                <a:spcPts val="1620"/>
+              </a:lnSpc>
+              <a:spcAft>
+                <a:spcPts val="300"/>
+              </a:spcAft>
+              <a:buNone/>
+            </a:pPr>
+            <a:r>
+              <a:rPr lang="en-US" sz="1200" dirty="0">
+                <a:solidFill>
+                  <a:srgbClr val="1C2833"/>
+                </a:solidFill>
+                <a:latin typeface="Arial" pitchFamily="34" charset="0"/>
+                <a:ea typeface="Arial" pitchFamily="34" charset="-122"/>
+                <a:cs typeface="Arial" pitchFamily="34" charset="-120"/>
+              </a:rPr>
+              <a:t> — Speech · fast, talkative · sharp, persuasive · slow, calm</a:t>
+            </a:r>
+            <a:endParaRPr lang="en-US" sz="1200" dirty="0"/>
+          </a:p>
+          <a:p>
+            <a:pPr algn="l" marL="342900" indent="-342900">
+              <a:lnSpc>
+                <a:spcPts val="1620"/>
+              </a:lnSpc>
+              <a:spcAft>
+                <a:spcPts val="300"/>
+              </a:spcAft>
+              <a:buSzPct val="100000"/>
+              <a:buChar char="•"/>
+            </a:pPr>
+            <a:r>
+              <a:rPr lang="en-US" sz="1200" b="1" dirty="0">
+                <a:solidFill>
+                  <a:srgbClr val="1C2833"/>
+                </a:solidFill>
+                <a:latin typeface="Arial" pitchFamily="34" charset="0"/>
+                <a:ea typeface="Arial" pitchFamily="34" charset="-122"/>
+                <a:cs typeface="Arial" pitchFamily="34" charset="-120"/>
+              </a:rPr>
+              <a:t>7</a:t>
+            </a:r>
+            <a:pPr algn="l" indent="0" marL="0">
+              <a:lnSpc>
+                <a:spcPts val="1620"/>
+              </a:lnSpc>
+              <a:spcAft>
+                <a:spcPts val="300"/>
+              </a:spcAft>
+              <a:buNone/>
+            </a:pPr>
+            <a:r>
+              <a:rPr lang="en-US" sz="1200" dirty="0">
+                <a:solidFill>
+                  <a:srgbClr val="1C2833"/>
+                </a:solidFill>
+                <a:latin typeface="Arial" pitchFamily="34" charset="0"/>
+                <a:ea typeface="Arial" pitchFamily="34" charset="-122"/>
+                <a:cs typeface="Arial" pitchFamily="34" charset="-120"/>
+              </a:rPr>
+              <a:t> — Memory · quick to learn, quick to forget · sharp, decisive · slow, lasting</a:t>
+            </a:r>
+            <a:endParaRPr lang="en-US" sz="1200" dirty="0"/>
+          </a:p>
+          <a:p>
+            <a:pPr algn="l" marL="342900" indent="-342900">
+              <a:lnSpc>
+                <a:spcPts val="1620"/>
+              </a:lnSpc>
+              <a:spcAft>
+                <a:spcPts val="300"/>
+              </a:spcAft>
+              <a:buSzPct val="100000"/>
+              <a:buChar char="•"/>
+            </a:pPr>
+            <a:r>
+              <a:rPr lang="en-US" sz="1200" b="1" dirty="0">
+                <a:solidFill>
+                  <a:srgbClr val="1C2833"/>
+                </a:solidFill>
+                <a:latin typeface="Arial" pitchFamily="34" charset="0"/>
+                <a:ea typeface="Arial" pitchFamily="34" charset="-122"/>
+                <a:cs typeface="Arial" pitchFamily="34" charset="-120"/>
+              </a:rPr>
+              <a:t>8</a:t>
+            </a:r>
+            <a:pPr algn="l" indent="0" marL="0">
+              <a:lnSpc>
+                <a:spcPts val="1620"/>
+              </a:lnSpc>
+              <a:spcAft>
+                <a:spcPts val="300"/>
+              </a:spcAft>
+              <a:buNone/>
+            </a:pPr>
+            <a:r>
+              <a:rPr lang="en-US" sz="1200" dirty="0">
+                <a:solidFill>
+                  <a:srgbClr val="1C2833"/>
+                </a:solidFill>
+                <a:latin typeface="Arial" pitchFamily="34" charset="0"/>
+                <a:ea typeface="Arial" pitchFamily="34" charset="-122"/>
+                <a:cs typeface="Arial" pitchFamily="34" charset="-120"/>
+              </a:rPr>
+              <a:t> — Stress · anxious, worried · irritable, frustrated · withdrawn, slow</a:t>
+            </a:r>
+            <a:endParaRPr lang="en-US" sz="1200" dirty="0"/>
+          </a:p>
+          <a:p>
+            <a:pPr algn="l" marL="342900" indent="-342900">
+              <a:lnSpc>
+                <a:spcPts val="1620"/>
+              </a:lnSpc>
+              <a:spcAft>
+                <a:spcPts val="300"/>
+              </a:spcAft>
+              <a:buSzPct val="100000"/>
+              <a:buChar char="•"/>
+            </a:pPr>
+            <a:r>
+              <a:rPr lang="en-US" sz="1200" b="1" dirty="0">
+                <a:solidFill>
+                  <a:srgbClr val="1C2833"/>
+                </a:solidFill>
+                <a:latin typeface="Arial" pitchFamily="34" charset="0"/>
+                <a:ea typeface="Arial" pitchFamily="34" charset="-122"/>
+                <a:cs typeface="Arial" pitchFamily="34" charset="-120"/>
+              </a:rPr>
+              <a:t>9</a:t>
+            </a:r>
+            <a:pPr algn="l" indent="0" marL="0">
+              <a:lnSpc>
+                <a:spcPts val="1620"/>
+              </a:lnSpc>
+              <a:spcAft>
+                <a:spcPts val="300"/>
+              </a:spcAft>
+              <a:buNone/>
+            </a:pPr>
+            <a:r>
+              <a:rPr lang="en-US" sz="1200" dirty="0">
+                <a:solidFill>
+                  <a:srgbClr val="1C2833"/>
+                </a:solidFill>
+                <a:latin typeface="Arial" pitchFamily="34" charset="0"/>
+                <a:ea typeface="Arial" pitchFamily="34" charset="-122"/>
+                <a:cs typeface="Arial" pitchFamily="34" charset="-120"/>
+              </a:rPr>
+              <a:t> — Weather preferred · warm · cool · warm and dry</a:t>
             </a:r>
             <a:endParaRPr lang="en-US" sz="1200" dirty="0"/>
           </a:p>
